--- a/public/fun/pack/pptx/talk/발표템플릿_30_연말결산·회고_빨간우체통.pptx
+++ b/public/fun/pack/pptx/talk/발표템플릿_30_연말결산·회고_빨간우체통.pptx
@@ -3286,6 +3286,14 @@
 <file path=ppt/slides/slide1.xml><?xml version="1.0" encoding="utf-8"?>
 <p:sld xmlns:a="http://schemas.openxmlformats.org/drawingml/2006/main" xmlns:p="http://schemas.openxmlformats.org/presentationml/2006/main" xmlns:r="http://schemas.openxmlformats.org/officeDocument/2006/relationships">
   <p:cSld>
+    <p:bg>
+      <p:bgPr>
+        <a:solidFill>
+          <a:srgbClr val="492E27"/>
+        </a:solidFill>
+        <a:effectLst/>
+      </p:bgPr>
+    </p:bg>
     <p:spTree>
       <p:nvGrpSpPr>
         <p:cNvPr id="1" name=""/>
@@ -3293,30 +3301,102 @@
         <p:nvPr/>
       </p:nvGrpSpPr>
       <p:grpSpPr/>
-      <p:pic>
-        <p:nvPicPr>
-          <p:cNvPr id="3" name="표지 그림" descr="talk-30.jpg"/>
-          <p:cNvPicPr>
-            <a:picLocks noChangeAspect="1"/>
-          </p:cNvPicPr>
+      <p:sp>
+        <p:nvSpPr>
+          <p:cNvPr id="3" name="장식"/>
+          <p:cNvSpPr/>
           <p:nvPr/>
-        </p:nvPicPr>
-        <p:blipFill>
-          <a:blip r:embed="rId2"/>
-          <a:stretch>
-            <a:fillRect/>
-          </a:stretch>
-        </p:blipFill>
+        </p:nvSpPr>
         <p:spPr>
           <a:xfrm>
             <a:off x="0" y="0"/>
-            <a:ext cx="12191695" cy="6858000"/>
+            <a:ext cx="3657508" cy="6858000"/>
           </a:xfrm>
           <a:prstGeom prst="rect">
             <a:avLst/>
           </a:prstGeom>
-        </p:spPr>
-      </p:pic>
+          <a:solidFill>
+            <a:srgbClr val="D88C79"/>
+          </a:solidFill>
+          <a:ln>
+            <a:noFill/>
+          </a:ln>
+        </p:spPr>
+        <p:txBody>
+          <a:bodyPr rtlCol="0" anchor="ctr"/>
+          <a:lstStyle/>
+          <a:p>
+            <a:pPr algn="ctr"/>
+          </a:p>
+        </p:txBody>
+      </p:sp>
+      <p:sp>
+        <p:nvSpPr>
+          <p:cNvPr id="4" name="장식"/>
+          <p:cNvSpPr/>
+          <p:nvPr/>
+        </p:nvSpPr>
+        <p:spPr>
+          <a:xfrm>
+            <a:off x="3108868" y="2880360"/>
+            <a:ext cx="1097280" cy="1097280"/>
+          </a:xfrm>
+          <a:prstGeom prst="ellipse">
+            <a:avLst/>
+          </a:prstGeom>
+          <a:solidFill>
+            <a:srgbClr val="A66B5C"/>
+          </a:solidFill>
+          <a:ln>
+            <a:noFill/>
+          </a:ln>
+        </p:spPr>
+        <p:txBody>
+          <a:bodyPr rtlCol="0" anchor="ctr"/>
+          <a:lstStyle/>
+          <a:p>
+            <a:pPr algn="ctr"/>
+          </a:p>
+        </p:txBody>
+      </p:sp>
+      <p:sp>
+        <p:nvSpPr>
+          <p:cNvPr id="5" name="라벨"/>
+          <p:cNvSpPr txBox="1"/>
+          <p:nvPr/>
+        </p:nvSpPr>
+        <p:spPr>
+          <a:xfrm>
+            <a:off x="4632844" y="2148840"/>
+            <a:ext cx="6705432" cy="274320"/>
+          </a:xfrm>
+          <a:prstGeom prst="rect">
+            <a:avLst/>
+          </a:prstGeom>
+          <a:noFill/>
+        </p:spPr>
+        <p:txBody>
+          <a:bodyPr wrap="square" lIns="54864" rIns="54864" tIns="27432" bIns="27432" anchor="t">
+            <a:noAutofit/>
+          </a:bodyPr>
+          <a:lstStyle/>
+          <a:p>
+            <a:pPr algn="l">
+              <a:lnSpc>
+                <a:spcPct val="115000"/>
+              </a:lnSpc>
+            </a:pPr>
+            <a:r>
+              <a:rPr sz="1000" b="1" i="0" spc="250">
+                <a:solidFill>
+                  <a:srgbClr val="FFFFFF"/>
+                </a:solidFill>
+              </a:rPr>
+              <a:t>PRESENTATION</a:t>
+            </a:r>
+          </a:p>
+        </p:txBody>
+      </p:sp>
       <p:sp>
         <p:nvSpPr>
           <p:cNvPr id="2" name="Title 1"/>
@@ -3329,8 +3409,8 @@
         </p:nvSpPr>
         <p:spPr>
           <a:xfrm>
-            <a:off x="853418" y="2057400"/>
-            <a:ext cx="6095847" cy="1554480"/>
+            <a:off x="4632844" y="2606040"/>
+            <a:ext cx="6705432" cy="1188720"/>
           </a:xfrm>
         </p:spPr>
         <p:txBody>
@@ -3345,9 +3425,9 @@
               </a:lnSpc>
             </a:pPr>
             <a:r>
-              <a:rPr sz="3600" b="1" i="0">
+              <a:rPr sz="4000" b="1" i="0">
                 <a:solidFill>
-                  <a:srgbClr val="5B2315"/>
+                  <a:srgbClr val="FFFFFF"/>
                 </a:solidFill>
               </a:rPr>
               <a:t>발표 제목을 입력하세요</a:t>
@@ -3357,14 +3437,14 @@
       </p:sp>
       <p:sp>
         <p:nvSpPr>
-          <p:cNvPr id="4" name="한 줄 문구"/>
+          <p:cNvPr id="6" name="한 줄 문구"/>
           <p:cNvSpPr txBox="1"/>
           <p:nvPr/>
         </p:nvSpPr>
         <p:spPr>
           <a:xfrm>
-            <a:off x="853418" y="3749039"/>
-            <a:ext cx="6095847" cy="822960"/>
+            <a:off x="4632844" y="3886200"/>
+            <a:ext cx="6705432" cy="822960"/>
           </a:xfrm>
           <a:prstGeom prst="rect">
             <a:avLst/>
@@ -3383,9 +3463,9 @@
               </a:lnSpc>
             </a:pPr>
             <a:r>
-              <a:rPr sz="1700" b="0" i="1">
+              <a:rPr sz="1700" b="0" i="0">
                 <a:solidFill>
-                  <a:srgbClr val="5B2315"/>
+                  <a:srgbClr val="FFFFFF"/>
                 </a:solidFill>
               </a:rPr>
               <a:t>아쉬웠던 일부터 먼저 말씀드립니다</a:t>
@@ -3395,14 +3475,14 @@
       </p:sp>
       <p:sp>
         <p:nvSpPr>
-          <p:cNvPr id="5" name="안내 문구"/>
+          <p:cNvPr id="7" name="안내 문구"/>
           <p:cNvSpPr txBox="1"/>
           <p:nvPr/>
         </p:nvSpPr>
         <p:spPr>
           <a:xfrm>
-            <a:off x="853418" y="4617720"/>
-            <a:ext cx="6095847" cy="914400"/>
+            <a:off x="4632844" y="4754880"/>
+            <a:ext cx="6705432" cy="914400"/>
           </a:xfrm>
           <a:prstGeom prst="rect">
             <a:avLst/>
@@ -3423,7 +3503,7 @@
             <a:r>
               <a:rPr sz="1400" b="0" i="0">
                 <a:solidFill>
-                  <a:srgbClr val="666666"/>
+                  <a:srgbClr val="FFFFFF"/>
                 </a:solidFill>
               </a:rPr>
               <a:t>연말 결산·회고 · 발표자 이름</a:t>
@@ -3438,10 +3518,10 @@
             <a:r>
               <a:rPr sz="1400" b="0" i="0">
                 <a:solidFill>
-                  <a:srgbClr val="666666"/>
+                  <a:srgbClr val="FFFFFF"/>
                 </a:solidFill>
               </a:rPr>
-              <a:t>2027. 00. 00</a:t>
+              <a:t>날짜 입력</a:t>
             </a:r>
           </a:p>
         </p:txBody>
@@ -3460,7 +3540,7 @@
     <p:bg>
       <p:bgPr>
         <a:solidFill>
-          <a:srgbClr val="FBF1EE"/>
+          <a:srgbClr val="FBEFEC"/>
         </a:solidFill>
         <a:effectLst/>
       </p:bgPr>
@@ -3474,23 +3554,20 @@
       <p:grpSpPr/>
       <p:sp>
         <p:nvSpPr>
-          <p:cNvPr id="3" name="장식"/>
+          <p:cNvPr id="3" name="포인트"/>
           <p:cNvSpPr/>
           <p:nvPr/>
         </p:nvSpPr>
         <p:spPr>
-          <a:xfrm rot="10800000">
-            <a:off x="10637215" y="0"/>
-            <a:ext cx="914400" cy="1554480"/>
+          <a:xfrm>
+            <a:off x="5958687" y="246888"/>
+            <a:ext cx="274320" cy="274320"/>
           </a:xfrm>
           <a:prstGeom prst="round2SameRect">
-            <a:avLst>
-              <a:gd name="adj1" fmla="val 50000"/>
-              <a:gd name="adj2" fmla="val 0"/>
-            </a:avLst>
+            <a:avLst/>
           </a:prstGeom>
           <a:solidFill>
-            <a:srgbClr val="F5D4CC"/>
+            <a:srgbClr val="D88C79"/>
           </a:solidFill>
           <a:ln>
             <a:noFill/>
@@ -3501,6 +3578,73 @@
           <a:lstStyle/>
           <a:p>
             <a:pPr algn="ctr"/>
+          </a:p>
+        </p:txBody>
+      </p:sp>
+      <p:sp>
+        <p:nvSpPr>
+          <p:cNvPr id="4" name="장식"/>
+          <p:cNvSpPr/>
+          <p:nvPr/>
+        </p:nvSpPr>
+        <p:spPr>
+          <a:xfrm>
+            <a:off x="5684367" y="1572768"/>
+            <a:ext cx="822960" cy="22860"/>
+          </a:xfrm>
+          <a:prstGeom prst="rect">
+            <a:avLst/>
+          </a:prstGeom>
+          <a:solidFill>
+            <a:srgbClr val="D88C79"/>
+          </a:solidFill>
+          <a:ln>
+            <a:noFill/>
+          </a:ln>
+        </p:spPr>
+        <p:txBody>
+          <a:bodyPr rtlCol="0" anchor="ctr"/>
+          <a:lstStyle/>
+          <a:p>
+            <a:pPr algn="ctr"/>
+          </a:p>
+        </p:txBody>
+      </p:sp>
+      <p:sp>
+        <p:nvSpPr>
+          <p:cNvPr id="5" name="상단 라벨"/>
+          <p:cNvSpPr txBox="1"/>
+          <p:nvPr/>
+        </p:nvSpPr>
+        <p:spPr>
+          <a:xfrm>
+            <a:off x="640080" y="182880"/>
+            <a:ext cx="3657600" cy="274320"/>
+          </a:xfrm>
+          <a:prstGeom prst="rect">
+            <a:avLst/>
+          </a:prstGeom>
+          <a:noFill/>
+        </p:spPr>
+        <p:txBody>
+          <a:bodyPr wrap="square" lIns="54864" rIns="54864" tIns="27432" bIns="27432" anchor="ctr">
+            <a:noAutofit/>
+          </a:bodyPr>
+          <a:lstStyle/>
+          <a:p>
+            <a:pPr algn="l">
+              <a:lnSpc>
+                <a:spcPct val="115000"/>
+              </a:lnSpc>
+            </a:pPr>
+            <a:r>
+              <a:rPr sz="800" b="1" i="0" spc="250">
+                <a:solidFill>
+                  <a:srgbClr val="8E8780"/>
+                </a:solidFill>
+              </a:rPr>
+              <a:t>PRESENTATION</a:t>
+            </a:r>
           </a:p>
         </p:txBody>
       </p:sp>
@@ -3516,8 +3660,8 @@
         </p:nvSpPr>
         <p:spPr>
           <a:xfrm>
-            <a:off x="640080" y="457200"/>
-            <a:ext cx="9722815" cy="868680"/>
+            <a:off x="1371600" y="640080"/>
+            <a:ext cx="9448495" cy="868680"/>
           </a:xfrm>
         </p:spPr>
         <p:txBody>
@@ -3526,7 +3670,7 @@
           </a:bodyPr>
           <a:lstStyle/>
           <a:p>
-            <a:pPr algn="l">
+            <a:pPr algn="ctr">
               <a:lnSpc>
                 <a:spcPct val="105000"/>
               </a:lnSpc>
@@ -3534,7 +3678,7 @@
             <a:r>
               <a:rPr sz="3000" b="1" i="0">
                 <a:solidFill>
-                  <a:srgbClr val="5B2315"/>
+                  <a:srgbClr val="26231F"/>
                 </a:solidFill>
               </a:rPr>
               <a:t>목차</a:t>
@@ -3544,26 +3688,24 @@
       </p:sp>
       <p:sp>
         <p:nvSpPr>
-          <p:cNvPr id="4" name="줄 1"/>
+          <p:cNvPr id="6" name="줄 1"/>
           <p:cNvSpPr/>
           <p:nvPr/>
         </p:nvSpPr>
         <p:spPr>
           <a:xfrm>
-            <a:off x="640080" y="1600200"/>
+            <a:off x="640080" y="1783080"/>
             <a:ext cx="10911535" cy="914400"/>
           </a:xfrm>
           <a:prstGeom prst="roundRect">
             <a:avLst>
-              <a:gd name="adj" fmla="val 8000"/>
+              <a:gd name="adj" fmla="val 7000"/>
             </a:avLst>
           </a:prstGeom>
-          <a:solidFill>
-            <a:srgbClr val="FBF1EE"/>
-          </a:solidFill>
-          <a:ln w="12700">
+          <a:noFill/>
+          <a:ln w="15875">
             <a:solidFill>
-              <a:srgbClr val="F5D4CC"/>
+              <a:srgbClr val="D88C79"/>
             </a:solidFill>
           </a:ln>
         </p:spPr>
@@ -3577,57 +3719,14 @@
       </p:sp>
       <p:sp>
         <p:nvSpPr>
-          <p:cNvPr id="5" name="번호 1"/>
-          <p:cNvSpPr/>
-          <p:nvPr/>
-        </p:nvSpPr>
-        <p:spPr>
-          <a:xfrm>
-            <a:off x="822959" y="1828800"/>
-            <a:ext cx="457200" cy="457200"/>
-          </a:xfrm>
-          <a:prstGeom prst="ellipse">
-            <a:avLst/>
-          </a:prstGeom>
-          <a:solidFill>
-            <a:srgbClr val="AE4329"/>
-          </a:solidFill>
-          <a:ln>
-            <a:noFill/>
-          </a:ln>
-        </p:spPr>
-        <p:txBody>
-          <a:bodyPr rtlCol="0" anchor="ctr" wrap="square" lIns="54864" rIns="54864" tIns="27432" bIns="27432">
-            <a:noAutofit/>
-          </a:bodyPr>
-          <a:lstStyle/>
-          <a:p>
-            <a:pPr algn="ctr">
-              <a:lnSpc>
-                <a:spcPct val="100000"/>
-              </a:lnSpc>
-            </a:pPr>
-            <a:r>
-              <a:rPr sz="1600" b="1" i="0">
-                <a:solidFill>
-                  <a:srgbClr val="FFFFFF"/>
-                </a:solidFill>
-              </a:rPr>
-              <a:t>1</a:t>
-            </a:r>
-          </a:p>
-        </p:txBody>
-      </p:sp>
-      <p:sp>
-        <p:nvSpPr>
-          <p:cNvPr id="6" name="TextBox 5"/>
+          <p:cNvPr id="7" name="번호 1"/>
           <p:cNvSpPr txBox="1"/>
           <p:nvPr/>
         </p:nvSpPr>
         <p:spPr>
           <a:xfrm>
-            <a:off x="1508760" y="1645920"/>
-            <a:ext cx="2743200" cy="822960"/>
+            <a:off x="731519" y="1965960"/>
+            <a:ext cx="914400" cy="548640"/>
           </a:xfrm>
           <a:prstGeom prst="rect">
             <a:avLst/>
@@ -3646,26 +3745,26 @@
               </a:lnSpc>
             </a:pPr>
             <a:r>
-              <a:rPr sz="1800" b="1" i="0">
+              <a:rPr sz="2400" b="1" i="0">
                 <a:solidFill>
-                  <a:srgbClr val="5B2315"/>
+                  <a:srgbClr val="D88C79"/>
                 </a:solidFill>
               </a:rPr>
-              <a:t>올해의 한 줄</a:t>
-            </a:r>
-          </a:p>
-        </p:txBody>
-      </p:sp>
-      <p:sp>
-        <p:nvSpPr>
-          <p:cNvPr id="7" name="TextBox 6"/>
+              <a:t>01</a:t>
+            </a:r>
+          </a:p>
+        </p:txBody>
+      </p:sp>
+      <p:sp>
+        <p:nvSpPr>
+          <p:cNvPr id="8" name="TextBox 7"/>
           <p:cNvSpPr txBox="1"/>
           <p:nvPr/>
         </p:nvSpPr>
         <p:spPr>
           <a:xfrm>
-            <a:off x="4297680" y="1645920"/>
-            <a:ext cx="7071055" cy="822960"/>
+            <a:off x="1508760" y="1828800"/>
+            <a:ext cx="2743200" cy="822960"/>
           </a:xfrm>
           <a:prstGeom prst="rect">
             <a:avLst/>
@@ -3684,102 +3783,26 @@
               </a:lnSpc>
             </a:pPr>
             <a:r>
-              <a:rPr sz="1500" b="0" i="0">
+              <a:rPr sz="1800" b="1" i="0">
                 <a:solidFill>
-                  <a:srgbClr val="2B2B2B"/>
+                  <a:srgbClr val="492E27"/>
                 </a:solidFill>
               </a:rPr>
-              <a:t>한 줄로 내용을 적어 주세요</a:t>
-            </a:r>
-          </a:p>
-        </p:txBody>
-      </p:sp>
-      <p:sp>
-        <p:nvSpPr>
-          <p:cNvPr id="8" name="줄 2"/>
-          <p:cNvSpPr/>
-          <p:nvPr/>
-        </p:nvSpPr>
-        <p:spPr>
-          <a:xfrm>
-            <a:off x="640080" y="2651760"/>
-            <a:ext cx="10911535" cy="914400"/>
-          </a:xfrm>
-          <a:prstGeom prst="roundRect">
-            <a:avLst>
-              <a:gd name="adj" fmla="val 8000"/>
-            </a:avLst>
-          </a:prstGeom>
-          <a:solidFill>
-            <a:srgbClr val="FBF1EE"/>
-          </a:solidFill>
-          <a:ln w="12700">
-            <a:solidFill>
-              <a:srgbClr val="F5D4CC"/>
-            </a:solidFill>
-          </a:ln>
-        </p:spPr>
-        <p:txBody>
-          <a:bodyPr rtlCol="0" anchor="ctr"/>
-          <a:lstStyle/>
-          <a:p>
-            <a:pPr algn="ctr"/>
-          </a:p>
-        </p:txBody>
-      </p:sp>
-      <p:sp>
-        <p:nvSpPr>
-          <p:cNvPr id="9" name="번호 2"/>
-          <p:cNvSpPr/>
-          <p:nvPr/>
-        </p:nvSpPr>
-        <p:spPr>
-          <a:xfrm>
-            <a:off x="822959" y="2880360"/>
-            <a:ext cx="457200" cy="457200"/>
-          </a:xfrm>
-          <a:prstGeom prst="ellipse">
-            <a:avLst/>
-          </a:prstGeom>
-          <a:solidFill>
-            <a:srgbClr val="AE4329"/>
-          </a:solidFill>
-          <a:ln>
-            <a:noFill/>
-          </a:ln>
-        </p:spPr>
-        <p:txBody>
-          <a:bodyPr rtlCol="0" anchor="ctr" wrap="square" lIns="54864" rIns="54864" tIns="27432" bIns="27432">
-            <a:noAutofit/>
-          </a:bodyPr>
-          <a:lstStyle/>
-          <a:p>
-            <a:pPr algn="ctr">
-              <a:lnSpc>
-                <a:spcPct val="100000"/>
-              </a:lnSpc>
-            </a:pPr>
-            <a:r>
-              <a:rPr sz="1600" b="1" i="0">
-                <a:solidFill>
-                  <a:srgbClr val="FFFFFF"/>
-                </a:solidFill>
-              </a:rPr>
-              <a:t>2</a:t>
-            </a:r>
-          </a:p>
-        </p:txBody>
-      </p:sp>
-      <p:sp>
-        <p:nvSpPr>
-          <p:cNvPr id="10" name="TextBox 9"/>
+              <a:t>올해의 한 줄</a:t>
+            </a:r>
+          </a:p>
+        </p:txBody>
+      </p:sp>
+      <p:sp>
+        <p:nvSpPr>
+          <p:cNvPr id="9" name="TextBox 8"/>
           <p:cNvSpPr txBox="1"/>
           <p:nvPr/>
         </p:nvSpPr>
         <p:spPr>
           <a:xfrm>
-            <a:off x="1508760" y="2697479"/>
-            <a:ext cx="2743200" cy="822960"/>
+            <a:off x="4297680" y="1828800"/>
+            <a:ext cx="7071055" cy="822960"/>
           </a:xfrm>
           <a:prstGeom prst="rect">
             <a:avLst/>
@@ -3798,26 +3821,57 @@
               </a:lnSpc>
             </a:pPr>
             <a:r>
-              <a:rPr sz="1800" b="1" i="0">
+              <a:rPr sz="1500" b="0" i="0">
                 <a:solidFill>
-                  <a:srgbClr val="5B2315"/>
+                  <a:srgbClr val="26231F"/>
                 </a:solidFill>
               </a:rPr>
-              <a:t>잘한 일</a:t>
-            </a:r>
-          </a:p>
-        </p:txBody>
-      </p:sp>
-      <p:sp>
-        <p:nvSpPr>
-          <p:cNvPr id="11" name="TextBox 10"/>
+              <a:t>한 줄로 내용을 적어 주세요</a:t>
+            </a:r>
+          </a:p>
+        </p:txBody>
+      </p:sp>
+      <p:sp>
+        <p:nvSpPr>
+          <p:cNvPr id="10" name="줄 2"/>
+          <p:cNvSpPr/>
+          <p:nvPr/>
+        </p:nvSpPr>
+        <p:spPr>
+          <a:xfrm>
+            <a:off x="640080" y="2834639"/>
+            <a:ext cx="10911535" cy="914400"/>
+          </a:xfrm>
+          <a:prstGeom prst="roundRect">
+            <a:avLst>
+              <a:gd name="adj" fmla="val 7000"/>
+            </a:avLst>
+          </a:prstGeom>
+          <a:noFill/>
+          <a:ln w="15875">
+            <a:solidFill>
+              <a:srgbClr val="D88C79"/>
+            </a:solidFill>
+          </a:ln>
+        </p:spPr>
+        <p:txBody>
+          <a:bodyPr rtlCol="0" anchor="ctr"/>
+          <a:lstStyle/>
+          <a:p>
+            <a:pPr algn="ctr"/>
+          </a:p>
+        </p:txBody>
+      </p:sp>
+      <p:sp>
+        <p:nvSpPr>
+          <p:cNvPr id="11" name="번호 2"/>
           <p:cNvSpPr txBox="1"/>
           <p:nvPr/>
         </p:nvSpPr>
         <p:spPr>
           <a:xfrm>
-            <a:off x="4297680" y="2697479"/>
-            <a:ext cx="7071055" cy="822960"/>
+            <a:off x="731519" y="3017520"/>
+            <a:ext cx="914400" cy="548640"/>
           </a:xfrm>
           <a:prstGeom prst="rect">
             <a:avLst/>
@@ -3836,101 +3890,25 @@
               </a:lnSpc>
             </a:pPr>
             <a:r>
-              <a:rPr sz="1500" b="0" i="0">
+              <a:rPr sz="2400" b="1" i="0">
                 <a:solidFill>
-                  <a:srgbClr val="2B2B2B"/>
+                  <a:srgbClr val="D88C79"/>
                 </a:solidFill>
               </a:rPr>
-              <a:t>한 줄로 내용을 적어 주세요</a:t>
-            </a:r>
-          </a:p>
-        </p:txBody>
-      </p:sp>
-      <p:sp>
-        <p:nvSpPr>
-          <p:cNvPr id="12" name="줄 3"/>
-          <p:cNvSpPr/>
-          <p:nvPr/>
-        </p:nvSpPr>
-        <p:spPr>
-          <a:xfrm>
-            <a:off x="640080" y="3703320"/>
-            <a:ext cx="10911535" cy="914400"/>
-          </a:xfrm>
-          <a:prstGeom prst="roundRect">
-            <a:avLst>
-              <a:gd name="adj" fmla="val 8000"/>
-            </a:avLst>
-          </a:prstGeom>
-          <a:solidFill>
-            <a:srgbClr val="FBF1EE"/>
-          </a:solidFill>
-          <a:ln w="12700">
-            <a:solidFill>
-              <a:srgbClr val="F5D4CC"/>
-            </a:solidFill>
-          </a:ln>
-        </p:spPr>
-        <p:txBody>
-          <a:bodyPr rtlCol="0" anchor="ctr"/>
-          <a:lstStyle/>
-          <a:p>
-            <a:pPr algn="ctr"/>
-          </a:p>
-        </p:txBody>
-      </p:sp>
-      <p:sp>
-        <p:nvSpPr>
-          <p:cNvPr id="13" name="번호 3"/>
-          <p:cNvSpPr/>
-          <p:nvPr/>
-        </p:nvSpPr>
-        <p:spPr>
-          <a:xfrm>
-            <a:off x="822959" y="3931920"/>
-            <a:ext cx="457200" cy="457200"/>
-          </a:xfrm>
-          <a:prstGeom prst="ellipse">
-            <a:avLst/>
-          </a:prstGeom>
-          <a:solidFill>
-            <a:srgbClr val="AE4329"/>
-          </a:solidFill>
-          <a:ln>
-            <a:noFill/>
-          </a:ln>
-        </p:spPr>
-        <p:txBody>
-          <a:bodyPr rtlCol="0" anchor="ctr" wrap="square" lIns="54864" rIns="54864" tIns="27432" bIns="27432">
-            <a:noAutofit/>
-          </a:bodyPr>
-          <a:lstStyle/>
-          <a:p>
-            <a:pPr algn="ctr">
-              <a:lnSpc>
-                <a:spcPct val="100000"/>
-              </a:lnSpc>
-            </a:pPr>
-            <a:r>
-              <a:rPr sz="1600" b="1" i="0">
-                <a:solidFill>
-                  <a:srgbClr val="FFFFFF"/>
-                </a:solidFill>
-              </a:rPr>
-              <a:t>3</a:t>
-            </a:r>
-          </a:p>
-        </p:txBody>
-      </p:sp>
-      <p:sp>
-        <p:nvSpPr>
-          <p:cNvPr id="14" name="TextBox 13"/>
+              <a:t>02</a:t>
+            </a:r>
+          </a:p>
+        </p:txBody>
+      </p:sp>
+      <p:sp>
+        <p:nvSpPr>
+          <p:cNvPr id="12" name="TextBox 11"/>
           <p:cNvSpPr txBox="1"/>
           <p:nvPr/>
         </p:nvSpPr>
         <p:spPr>
           <a:xfrm>
-            <a:off x="1508760" y="3749039"/>
+            <a:off x="1508760" y="2880359"/>
             <a:ext cx="2743200" cy="822960"/>
           </a:xfrm>
           <a:prstGeom prst="rect">
@@ -3952,23 +3930,23 @@
             <a:r>
               <a:rPr sz="1800" b="1" i="0">
                 <a:solidFill>
-                  <a:srgbClr val="5B2315"/>
+                  <a:srgbClr val="492E27"/>
                 </a:solidFill>
               </a:rPr>
-              <a:t>아쉬운 일</a:t>
-            </a:r>
-          </a:p>
-        </p:txBody>
-      </p:sp>
-      <p:sp>
-        <p:nvSpPr>
-          <p:cNvPr id="15" name="TextBox 14"/>
+              <a:t>잘한 일</a:t>
+            </a:r>
+          </a:p>
+        </p:txBody>
+      </p:sp>
+      <p:sp>
+        <p:nvSpPr>
+          <p:cNvPr id="13" name="TextBox 12"/>
           <p:cNvSpPr txBox="1"/>
           <p:nvPr/>
         </p:nvSpPr>
         <p:spPr>
           <a:xfrm>
-            <a:off x="4297680" y="3749039"/>
+            <a:off x="4297680" y="2880359"/>
             <a:ext cx="7071055" cy="822960"/>
           </a:xfrm>
           <a:prstGeom prst="rect">
@@ -3990,7 +3968,7 @@
             <a:r>
               <a:rPr sz="1500" b="0" i="0">
                 <a:solidFill>
-                  <a:srgbClr val="2B2B2B"/>
+                  <a:srgbClr val="26231F"/>
                 </a:solidFill>
               </a:rPr>
               <a:t>한 줄로 내용을 적어 주세요</a:t>
@@ -4000,26 +3978,24 @@
       </p:sp>
       <p:sp>
         <p:nvSpPr>
-          <p:cNvPr id="16" name="줄 4"/>
+          <p:cNvPr id="14" name="줄 3"/>
           <p:cNvSpPr/>
           <p:nvPr/>
         </p:nvSpPr>
         <p:spPr>
           <a:xfrm>
-            <a:off x="640080" y="4754879"/>
+            <a:off x="640080" y="3886200"/>
             <a:ext cx="10911535" cy="914400"/>
           </a:xfrm>
           <a:prstGeom prst="roundRect">
             <a:avLst>
-              <a:gd name="adj" fmla="val 8000"/>
+              <a:gd name="adj" fmla="val 7000"/>
             </a:avLst>
           </a:prstGeom>
-          <a:solidFill>
-            <a:srgbClr val="FBF1EE"/>
-          </a:solidFill>
-          <a:ln w="12700">
+          <a:noFill/>
+          <a:ln w="15875">
             <a:solidFill>
-              <a:srgbClr val="F5D4CC"/>
+              <a:srgbClr val="D88C79"/>
             </a:solidFill>
           </a:ln>
         </p:spPr>
@@ -4033,57 +4009,14 @@
       </p:sp>
       <p:sp>
         <p:nvSpPr>
-          <p:cNvPr id="17" name="번호 4"/>
-          <p:cNvSpPr/>
-          <p:nvPr/>
-        </p:nvSpPr>
-        <p:spPr>
-          <a:xfrm>
-            <a:off x="822959" y="4983479"/>
-            <a:ext cx="457200" cy="457200"/>
-          </a:xfrm>
-          <a:prstGeom prst="ellipse">
-            <a:avLst/>
-          </a:prstGeom>
-          <a:solidFill>
-            <a:srgbClr val="AE4329"/>
-          </a:solidFill>
-          <a:ln>
-            <a:noFill/>
-          </a:ln>
-        </p:spPr>
-        <p:txBody>
-          <a:bodyPr rtlCol="0" anchor="ctr" wrap="square" lIns="54864" rIns="54864" tIns="27432" bIns="27432">
-            <a:noAutofit/>
-          </a:bodyPr>
-          <a:lstStyle/>
-          <a:p>
-            <a:pPr algn="ctr">
-              <a:lnSpc>
-                <a:spcPct val="100000"/>
-              </a:lnSpc>
-            </a:pPr>
-            <a:r>
-              <a:rPr sz="1600" b="1" i="0">
-                <a:solidFill>
-                  <a:srgbClr val="FFFFFF"/>
-                </a:solidFill>
-              </a:rPr>
-              <a:t>4</a:t>
-            </a:r>
-          </a:p>
-        </p:txBody>
-      </p:sp>
-      <p:sp>
-        <p:nvSpPr>
-          <p:cNvPr id="18" name="TextBox 17"/>
+          <p:cNvPr id="15" name="번호 3"/>
           <p:cNvSpPr txBox="1"/>
           <p:nvPr/>
         </p:nvSpPr>
         <p:spPr>
           <a:xfrm>
-            <a:off x="1508760" y="4800599"/>
-            <a:ext cx="2743200" cy="822960"/>
+            <a:off x="731519" y="4069080"/>
+            <a:ext cx="914400" cy="548640"/>
           </a:xfrm>
           <a:prstGeom prst="rect">
             <a:avLst/>
@@ -4102,26 +4035,26 @@
               </a:lnSpc>
             </a:pPr>
             <a:r>
-              <a:rPr sz="1800" b="1" i="0">
+              <a:rPr sz="2400" b="1" i="0">
                 <a:solidFill>
-                  <a:srgbClr val="5B2315"/>
+                  <a:srgbClr val="D88C79"/>
                 </a:solidFill>
               </a:rPr>
-              <a:t>내년의 다짐</a:t>
-            </a:r>
-          </a:p>
-        </p:txBody>
-      </p:sp>
-      <p:sp>
-        <p:nvSpPr>
-          <p:cNvPr id="19" name="TextBox 18"/>
+              <a:t>03</a:t>
+            </a:r>
+          </a:p>
+        </p:txBody>
+      </p:sp>
+      <p:sp>
+        <p:nvSpPr>
+          <p:cNvPr id="16" name="TextBox 15"/>
           <p:cNvSpPr txBox="1"/>
           <p:nvPr/>
         </p:nvSpPr>
         <p:spPr>
           <a:xfrm>
-            <a:off x="4297680" y="4800599"/>
-            <a:ext cx="7071055" cy="822960"/>
+            <a:off x="1508760" y="3931920"/>
+            <a:ext cx="2743200" cy="822960"/>
           </a:xfrm>
           <a:prstGeom prst="rect">
             <a:avLst/>
@@ -4140,9 +4073,192 @@
               </a:lnSpc>
             </a:pPr>
             <a:r>
+              <a:rPr sz="1800" b="1" i="0">
+                <a:solidFill>
+                  <a:srgbClr val="492E27"/>
+                </a:solidFill>
+              </a:rPr>
+              <a:t>아쉬운 일</a:t>
+            </a:r>
+          </a:p>
+        </p:txBody>
+      </p:sp>
+      <p:sp>
+        <p:nvSpPr>
+          <p:cNvPr id="17" name="TextBox 16"/>
+          <p:cNvSpPr txBox="1"/>
+          <p:nvPr/>
+        </p:nvSpPr>
+        <p:spPr>
+          <a:xfrm>
+            <a:off x="4297680" y="3931920"/>
+            <a:ext cx="7071055" cy="822960"/>
+          </a:xfrm>
+          <a:prstGeom prst="rect">
+            <a:avLst/>
+          </a:prstGeom>
+          <a:noFill/>
+        </p:spPr>
+        <p:txBody>
+          <a:bodyPr wrap="square" lIns="54864" rIns="54864" tIns="27432" bIns="27432" anchor="ctr">
+            <a:noAutofit/>
+          </a:bodyPr>
+          <a:lstStyle/>
+          <a:p>
+            <a:pPr algn="l">
+              <a:lnSpc>
+                <a:spcPct val="115000"/>
+              </a:lnSpc>
+            </a:pPr>
+            <a:r>
               <a:rPr sz="1500" b="0" i="0">
                 <a:solidFill>
-                  <a:srgbClr val="2B2B2B"/>
+                  <a:srgbClr val="26231F"/>
+                </a:solidFill>
+              </a:rPr>
+              <a:t>한 줄로 내용을 적어 주세요</a:t>
+            </a:r>
+          </a:p>
+        </p:txBody>
+      </p:sp>
+      <p:sp>
+        <p:nvSpPr>
+          <p:cNvPr id="18" name="줄 4"/>
+          <p:cNvSpPr/>
+          <p:nvPr/>
+        </p:nvSpPr>
+        <p:spPr>
+          <a:xfrm>
+            <a:off x="640080" y="4937759"/>
+            <a:ext cx="10911535" cy="914400"/>
+          </a:xfrm>
+          <a:prstGeom prst="roundRect">
+            <a:avLst>
+              <a:gd name="adj" fmla="val 7000"/>
+            </a:avLst>
+          </a:prstGeom>
+          <a:noFill/>
+          <a:ln w="15875">
+            <a:solidFill>
+              <a:srgbClr val="D88C79"/>
+            </a:solidFill>
+          </a:ln>
+        </p:spPr>
+        <p:txBody>
+          <a:bodyPr rtlCol="0" anchor="ctr"/>
+          <a:lstStyle/>
+          <a:p>
+            <a:pPr algn="ctr"/>
+          </a:p>
+        </p:txBody>
+      </p:sp>
+      <p:sp>
+        <p:nvSpPr>
+          <p:cNvPr id="19" name="번호 4"/>
+          <p:cNvSpPr txBox="1"/>
+          <p:nvPr/>
+        </p:nvSpPr>
+        <p:spPr>
+          <a:xfrm>
+            <a:off x="731519" y="5120640"/>
+            <a:ext cx="914400" cy="548640"/>
+          </a:xfrm>
+          <a:prstGeom prst="rect">
+            <a:avLst/>
+          </a:prstGeom>
+          <a:noFill/>
+        </p:spPr>
+        <p:txBody>
+          <a:bodyPr wrap="square" lIns="54864" rIns="54864" tIns="27432" bIns="27432" anchor="ctr">
+            <a:noAutofit/>
+          </a:bodyPr>
+          <a:lstStyle/>
+          <a:p>
+            <a:pPr algn="l">
+              <a:lnSpc>
+                <a:spcPct val="115000"/>
+              </a:lnSpc>
+            </a:pPr>
+            <a:r>
+              <a:rPr sz="2400" b="1" i="0">
+                <a:solidFill>
+                  <a:srgbClr val="D88C79"/>
+                </a:solidFill>
+              </a:rPr>
+              <a:t>04</a:t>
+            </a:r>
+          </a:p>
+        </p:txBody>
+      </p:sp>
+      <p:sp>
+        <p:nvSpPr>
+          <p:cNvPr id="20" name="TextBox 19"/>
+          <p:cNvSpPr txBox="1"/>
+          <p:nvPr/>
+        </p:nvSpPr>
+        <p:spPr>
+          <a:xfrm>
+            <a:off x="1508760" y="4983479"/>
+            <a:ext cx="2743200" cy="822960"/>
+          </a:xfrm>
+          <a:prstGeom prst="rect">
+            <a:avLst/>
+          </a:prstGeom>
+          <a:noFill/>
+        </p:spPr>
+        <p:txBody>
+          <a:bodyPr wrap="square" lIns="54864" rIns="54864" tIns="27432" bIns="27432" anchor="ctr">
+            <a:noAutofit/>
+          </a:bodyPr>
+          <a:lstStyle/>
+          <a:p>
+            <a:pPr algn="l">
+              <a:lnSpc>
+                <a:spcPct val="115000"/>
+              </a:lnSpc>
+            </a:pPr>
+            <a:r>
+              <a:rPr sz="1800" b="1" i="0">
+                <a:solidFill>
+                  <a:srgbClr val="492E27"/>
+                </a:solidFill>
+              </a:rPr>
+              <a:t>내년의 다짐</a:t>
+            </a:r>
+          </a:p>
+        </p:txBody>
+      </p:sp>
+      <p:sp>
+        <p:nvSpPr>
+          <p:cNvPr id="21" name="TextBox 20"/>
+          <p:cNvSpPr txBox="1"/>
+          <p:nvPr/>
+        </p:nvSpPr>
+        <p:spPr>
+          <a:xfrm>
+            <a:off x="4297680" y="4983479"/>
+            <a:ext cx="7071055" cy="822960"/>
+          </a:xfrm>
+          <a:prstGeom prst="rect">
+            <a:avLst/>
+          </a:prstGeom>
+          <a:noFill/>
+        </p:spPr>
+        <p:txBody>
+          <a:bodyPr wrap="square" lIns="54864" rIns="54864" tIns="27432" bIns="27432" anchor="ctr">
+            <a:noAutofit/>
+          </a:bodyPr>
+          <a:lstStyle/>
+          <a:p>
+            <a:pPr algn="l">
+              <a:lnSpc>
+                <a:spcPct val="115000"/>
+              </a:lnSpc>
+            </a:pPr>
+            <a:r>
+              <a:rPr sz="1500" b="0" i="0">
+                <a:solidFill>
+                  <a:srgbClr val="26231F"/>
                 </a:solidFill>
               </a:rPr>
               <a:t>한 줄로 내용을 적어 주세요</a:t>
@@ -4164,7 +4280,7 @@
     <p:bg>
       <p:bgPr>
         <a:solidFill>
-          <a:srgbClr val="FBF1EE"/>
+          <a:srgbClr val="FBEFEC"/>
         </a:solidFill>
         <a:effectLst/>
       </p:bgPr>
@@ -4178,23 +4294,20 @@
       <p:grpSpPr/>
       <p:sp>
         <p:nvSpPr>
-          <p:cNvPr id="3" name="장식"/>
+          <p:cNvPr id="3" name="포인트"/>
           <p:cNvSpPr/>
           <p:nvPr/>
         </p:nvSpPr>
         <p:spPr>
-          <a:xfrm rot="10800000">
-            <a:off x="10637215" y="0"/>
-            <a:ext cx="914400" cy="1554480"/>
+          <a:xfrm>
+            <a:off x="5958687" y="246888"/>
+            <a:ext cx="274320" cy="274320"/>
           </a:xfrm>
           <a:prstGeom prst="round2SameRect">
-            <a:avLst>
-              <a:gd name="adj1" fmla="val 50000"/>
-              <a:gd name="adj2" fmla="val 0"/>
-            </a:avLst>
+            <a:avLst/>
           </a:prstGeom>
           <a:solidFill>
-            <a:srgbClr val="F5D4CC"/>
+            <a:srgbClr val="D88C79"/>
           </a:solidFill>
           <a:ln>
             <a:noFill/>
@@ -4205,6 +4318,73 @@
           <a:lstStyle/>
           <a:p>
             <a:pPr algn="ctr"/>
+          </a:p>
+        </p:txBody>
+      </p:sp>
+      <p:sp>
+        <p:nvSpPr>
+          <p:cNvPr id="4" name="장식"/>
+          <p:cNvSpPr/>
+          <p:nvPr/>
+        </p:nvSpPr>
+        <p:spPr>
+          <a:xfrm>
+            <a:off x="5684367" y="1572768"/>
+            <a:ext cx="822960" cy="22860"/>
+          </a:xfrm>
+          <a:prstGeom prst="rect">
+            <a:avLst/>
+          </a:prstGeom>
+          <a:solidFill>
+            <a:srgbClr val="D88C79"/>
+          </a:solidFill>
+          <a:ln>
+            <a:noFill/>
+          </a:ln>
+        </p:spPr>
+        <p:txBody>
+          <a:bodyPr rtlCol="0" anchor="ctr"/>
+          <a:lstStyle/>
+          <a:p>
+            <a:pPr algn="ctr"/>
+          </a:p>
+        </p:txBody>
+      </p:sp>
+      <p:sp>
+        <p:nvSpPr>
+          <p:cNvPr id="5" name="상단 라벨"/>
+          <p:cNvSpPr txBox="1"/>
+          <p:nvPr/>
+        </p:nvSpPr>
+        <p:spPr>
+          <a:xfrm>
+            <a:off x="640080" y="182880"/>
+            <a:ext cx="3657600" cy="274320"/>
+          </a:xfrm>
+          <a:prstGeom prst="rect">
+            <a:avLst/>
+          </a:prstGeom>
+          <a:noFill/>
+        </p:spPr>
+        <p:txBody>
+          <a:bodyPr wrap="square" lIns="54864" rIns="54864" tIns="27432" bIns="27432" anchor="ctr">
+            <a:noAutofit/>
+          </a:bodyPr>
+          <a:lstStyle/>
+          <a:p>
+            <a:pPr algn="l">
+              <a:lnSpc>
+                <a:spcPct val="115000"/>
+              </a:lnSpc>
+            </a:pPr>
+            <a:r>
+              <a:rPr sz="800" b="1" i="0" spc="250">
+                <a:solidFill>
+                  <a:srgbClr val="8E8780"/>
+                </a:solidFill>
+              </a:rPr>
+              <a:t>PRESENTATION</a:t>
+            </a:r>
           </a:p>
         </p:txBody>
       </p:sp>
@@ -4220,8 +4400,8 @@
         </p:nvSpPr>
         <p:spPr>
           <a:xfrm>
-            <a:off x="640080" y="457200"/>
-            <a:ext cx="9722815" cy="868680"/>
+            <a:off x="1371600" y="640080"/>
+            <a:ext cx="9448495" cy="868680"/>
           </a:xfrm>
         </p:spPr>
         <p:txBody>
@@ -4230,7 +4410,7 @@
           </a:bodyPr>
           <a:lstStyle/>
           <a:p>
-            <a:pPr algn="l">
+            <a:pPr algn="ctr">
               <a:lnSpc>
                 <a:spcPct val="105000"/>
               </a:lnSpc>
@@ -4238,7 +4418,7 @@
             <a:r>
               <a:rPr sz="3000" b="1" i="0">
                 <a:solidFill>
-                  <a:srgbClr val="5B2315"/>
+                  <a:srgbClr val="26231F"/>
                 </a:solidFill>
               </a:rPr>
               <a:t>핵심 메시지</a:t>
@@ -4248,13 +4428,13 @@
       </p:sp>
       <p:sp>
         <p:nvSpPr>
-          <p:cNvPr id="4" name="핵심 문장"/>
+          <p:cNvPr id="6" name="핵심 문장"/>
           <p:cNvSpPr txBox="1"/>
           <p:nvPr/>
         </p:nvSpPr>
         <p:spPr>
           <a:xfrm>
-            <a:off x="640080" y="1600200"/>
+            <a:off x="640080" y="1783080"/>
             <a:ext cx="10911535" cy="1188720"/>
           </a:xfrm>
           <a:prstGeom prst="rect">
@@ -4276,7 +4456,7 @@
             <a:r>
               <a:rPr sz="2600" b="1" i="0">
                 <a:solidFill>
-                  <a:srgbClr val="5B2315"/>
+                  <a:srgbClr val="492E27"/>
                 </a:solidFill>
               </a:rPr>
               <a:t>한 문장으로 말하면 — 여기에 핵심 메시지를 입력하세요</a:t>
@@ -4286,26 +4466,24 @@
       </p:sp>
       <p:sp>
         <p:nvSpPr>
-          <p:cNvPr id="5" name="카드 1"/>
+          <p:cNvPr id="7" name="카드 1"/>
           <p:cNvSpPr/>
           <p:nvPr/>
         </p:nvSpPr>
         <p:spPr>
           <a:xfrm>
-            <a:off x="640080" y="3063240"/>
+            <a:off x="640080" y="3246120"/>
             <a:ext cx="3484778" cy="3017520"/>
           </a:xfrm>
           <a:prstGeom prst="roundRect">
             <a:avLst>
-              <a:gd name="adj" fmla="val 8000"/>
+              <a:gd name="adj" fmla="val 7000"/>
             </a:avLst>
           </a:prstGeom>
-          <a:solidFill>
-            <a:srgbClr val="FBF1EE"/>
-          </a:solidFill>
+          <a:noFill/>
           <a:ln w="15875">
             <a:solidFill>
-              <a:srgbClr val="F5D4CC"/>
+              <a:srgbClr val="D88C79"/>
             </a:solidFill>
           </a:ln>
         </p:spPr>
@@ -4319,57 +4497,14 @@
       </p:sp>
       <p:sp>
         <p:nvSpPr>
-          <p:cNvPr id="6" name="번호 1"/>
-          <p:cNvSpPr/>
-          <p:nvPr/>
-        </p:nvSpPr>
-        <p:spPr>
-          <a:xfrm>
-            <a:off x="822959" y="3246120"/>
-            <a:ext cx="457200" cy="457200"/>
-          </a:xfrm>
-          <a:prstGeom prst="ellipse">
-            <a:avLst/>
-          </a:prstGeom>
-          <a:solidFill>
-            <a:srgbClr val="AE4329"/>
-          </a:solidFill>
-          <a:ln>
-            <a:noFill/>
-          </a:ln>
-        </p:spPr>
-        <p:txBody>
-          <a:bodyPr rtlCol="0" anchor="ctr" wrap="square" lIns="54864" rIns="54864" tIns="27432" bIns="27432">
-            <a:noAutofit/>
-          </a:bodyPr>
-          <a:lstStyle/>
-          <a:p>
-            <a:pPr algn="ctr">
-              <a:lnSpc>
-                <a:spcPct val="100000"/>
-              </a:lnSpc>
-            </a:pPr>
-            <a:r>
-              <a:rPr sz="1600" b="1" i="0">
-                <a:solidFill>
-                  <a:srgbClr val="FFFFFF"/>
-                </a:solidFill>
-              </a:rPr>
-              <a:t>1</a:t>
-            </a:r>
-          </a:p>
-        </p:txBody>
-      </p:sp>
-      <p:sp>
-        <p:nvSpPr>
-          <p:cNvPr id="7" name="TextBox 6"/>
+          <p:cNvPr id="8" name="번호 1"/>
           <p:cNvSpPr txBox="1"/>
           <p:nvPr/>
         </p:nvSpPr>
         <p:spPr>
           <a:xfrm>
-            <a:off x="777240" y="3840480"/>
-            <a:ext cx="3210458" cy="640080"/>
+            <a:off x="731519" y="3383280"/>
+            <a:ext cx="914400" cy="548640"/>
           </a:xfrm>
           <a:prstGeom prst="rect">
             <a:avLst/>
@@ -4388,9 +4523,47 @@
               </a:lnSpc>
             </a:pPr>
             <a:r>
+              <a:rPr sz="2400" b="1" i="0">
+                <a:solidFill>
+                  <a:srgbClr val="D88C79"/>
+                </a:solidFill>
+              </a:rPr>
+              <a:t>01</a:t>
+            </a:r>
+          </a:p>
+        </p:txBody>
+      </p:sp>
+      <p:sp>
+        <p:nvSpPr>
+          <p:cNvPr id="9" name="TextBox 8"/>
+          <p:cNvSpPr txBox="1"/>
+          <p:nvPr/>
+        </p:nvSpPr>
+        <p:spPr>
+          <a:xfrm>
+            <a:off x="777240" y="4023360"/>
+            <a:ext cx="3210458" cy="640080"/>
+          </a:xfrm>
+          <a:prstGeom prst="rect">
+            <a:avLst/>
+          </a:prstGeom>
+          <a:noFill/>
+        </p:spPr>
+        <p:txBody>
+          <a:bodyPr wrap="square" lIns="54864" rIns="54864" tIns="27432" bIns="27432" anchor="ctr">
+            <a:noAutofit/>
+          </a:bodyPr>
+          <a:lstStyle/>
+          <a:p>
+            <a:pPr algn="l">
+              <a:lnSpc>
+                <a:spcPct val="115000"/>
+              </a:lnSpc>
+            </a:pPr>
+            <a:r>
               <a:rPr sz="1800" b="1" i="0">
                 <a:solidFill>
-                  <a:srgbClr val="5B2315"/>
+                  <a:srgbClr val="492E27"/>
                 </a:solidFill>
               </a:rPr>
               <a:t>잘한 점</a:t>
@@ -4400,13 +4573,13 @@
       </p:sp>
       <p:sp>
         <p:nvSpPr>
-          <p:cNvPr id="8" name="TextBox 7"/>
+          <p:cNvPr id="10" name="TextBox 9"/>
           <p:cNvSpPr txBox="1"/>
           <p:nvPr/>
         </p:nvSpPr>
         <p:spPr>
           <a:xfrm>
-            <a:off x="777240" y="4526280"/>
+            <a:off x="777240" y="4709160"/>
             <a:ext cx="3210458" cy="1417319"/>
           </a:xfrm>
           <a:prstGeom prst="rect">
@@ -4428,7 +4601,7 @@
             <a:r>
               <a:rPr sz="1600" b="0" i="0">
                 <a:solidFill>
-                  <a:srgbClr val="2B2B2B"/>
+                  <a:srgbClr val="26231F"/>
                 </a:solidFill>
               </a:rPr>
               <a:t>내용을 입력하세요</a:t>
@@ -4443,7 +4616,7 @@
             <a:r>
               <a:rPr sz="1600" b="0" i="0">
                 <a:solidFill>
-                  <a:srgbClr val="2B2B2B"/>
+                  <a:srgbClr val="26231F"/>
                 </a:solidFill>
               </a:rPr>
               <a:t>내용을 입력하세요</a:t>
@@ -4453,26 +4626,24 @@
       </p:sp>
       <p:sp>
         <p:nvSpPr>
-          <p:cNvPr id="9" name="카드 2"/>
+          <p:cNvPr id="11" name="카드 2"/>
           <p:cNvSpPr/>
           <p:nvPr/>
         </p:nvSpPr>
         <p:spPr>
           <a:xfrm>
-            <a:off x="4353458" y="3063240"/>
+            <a:off x="4353458" y="3246120"/>
             <a:ext cx="3484778" cy="3017520"/>
           </a:xfrm>
           <a:prstGeom prst="roundRect">
             <a:avLst>
-              <a:gd name="adj" fmla="val 8000"/>
+              <a:gd name="adj" fmla="val 7000"/>
             </a:avLst>
           </a:prstGeom>
-          <a:solidFill>
-            <a:srgbClr val="FBF1EE"/>
-          </a:solidFill>
+          <a:noFill/>
           <a:ln w="15875">
             <a:solidFill>
-              <a:srgbClr val="F5D4CC"/>
+              <a:srgbClr val="D88C79"/>
             </a:solidFill>
           </a:ln>
         </p:spPr>
@@ -4486,57 +4657,14 @@
       </p:sp>
       <p:sp>
         <p:nvSpPr>
-          <p:cNvPr id="10" name="번호 2"/>
-          <p:cNvSpPr/>
-          <p:nvPr/>
-        </p:nvSpPr>
-        <p:spPr>
-          <a:xfrm>
-            <a:off x="4536338" y="3246120"/>
-            <a:ext cx="457200" cy="457200"/>
-          </a:xfrm>
-          <a:prstGeom prst="ellipse">
-            <a:avLst/>
-          </a:prstGeom>
-          <a:solidFill>
-            <a:srgbClr val="AE4329"/>
-          </a:solidFill>
-          <a:ln>
-            <a:noFill/>
-          </a:ln>
-        </p:spPr>
-        <p:txBody>
-          <a:bodyPr rtlCol="0" anchor="ctr" wrap="square" lIns="54864" rIns="54864" tIns="27432" bIns="27432">
-            <a:noAutofit/>
-          </a:bodyPr>
-          <a:lstStyle/>
-          <a:p>
-            <a:pPr algn="ctr">
-              <a:lnSpc>
-                <a:spcPct val="100000"/>
-              </a:lnSpc>
-            </a:pPr>
-            <a:r>
-              <a:rPr sz="1600" b="1" i="0">
-                <a:solidFill>
-                  <a:srgbClr val="FFFFFF"/>
-                </a:solidFill>
-              </a:rPr>
-              <a:t>2</a:t>
-            </a:r>
-          </a:p>
-        </p:txBody>
-      </p:sp>
-      <p:sp>
-        <p:nvSpPr>
-          <p:cNvPr id="11" name="TextBox 10"/>
+          <p:cNvPr id="12" name="번호 2"/>
           <p:cNvSpPr txBox="1"/>
           <p:nvPr/>
         </p:nvSpPr>
         <p:spPr>
           <a:xfrm>
-            <a:off x="4490618" y="3840480"/>
-            <a:ext cx="3210458" cy="640080"/>
+            <a:off x="4444898" y="3383280"/>
+            <a:ext cx="914400" cy="548640"/>
           </a:xfrm>
           <a:prstGeom prst="rect">
             <a:avLst/>
@@ -4555,9 +4683,47 @@
               </a:lnSpc>
             </a:pPr>
             <a:r>
+              <a:rPr sz="2400" b="1" i="0">
+                <a:solidFill>
+                  <a:srgbClr val="D88C79"/>
+                </a:solidFill>
+              </a:rPr>
+              <a:t>02</a:t>
+            </a:r>
+          </a:p>
+        </p:txBody>
+      </p:sp>
+      <p:sp>
+        <p:nvSpPr>
+          <p:cNvPr id="13" name="TextBox 12"/>
+          <p:cNvSpPr txBox="1"/>
+          <p:nvPr/>
+        </p:nvSpPr>
+        <p:spPr>
+          <a:xfrm>
+            <a:off x="4490618" y="4023360"/>
+            <a:ext cx="3210458" cy="640080"/>
+          </a:xfrm>
+          <a:prstGeom prst="rect">
+            <a:avLst/>
+          </a:prstGeom>
+          <a:noFill/>
+        </p:spPr>
+        <p:txBody>
+          <a:bodyPr wrap="square" lIns="54864" rIns="54864" tIns="27432" bIns="27432" anchor="ctr">
+            <a:noAutofit/>
+          </a:bodyPr>
+          <a:lstStyle/>
+          <a:p>
+            <a:pPr algn="l">
+              <a:lnSpc>
+                <a:spcPct val="115000"/>
+              </a:lnSpc>
+            </a:pPr>
+            <a:r>
               <a:rPr sz="1800" b="1" i="0">
                 <a:solidFill>
-                  <a:srgbClr val="5B2315"/>
+                  <a:srgbClr val="492E27"/>
                 </a:solidFill>
               </a:rPr>
               <a:t>배운 점</a:t>
@@ -4567,13 +4733,13 @@
       </p:sp>
       <p:sp>
         <p:nvSpPr>
-          <p:cNvPr id="12" name="TextBox 11"/>
+          <p:cNvPr id="14" name="TextBox 13"/>
           <p:cNvSpPr txBox="1"/>
           <p:nvPr/>
         </p:nvSpPr>
         <p:spPr>
           <a:xfrm>
-            <a:off x="4490618" y="4526280"/>
+            <a:off x="4490618" y="4709160"/>
             <a:ext cx="3210458" cy="1417319"/>
           </a:xfrm>
           <a:prstGeom prst="rect">
@@ -4595,7 +4761,7 @@
             <a:r>
               <a:rPr sz="1600" b="0" i="0">
                 <a:solidFill>
-                  <a:srgbClr val="2B2B2B"/>
+                  <a:srgbClr val="26231F"/>
                 </a:solidFill>
               </a:rPr>
               <a:t>내용을 입력하세요</a:t>
@@ -4610,7 +4776,7 @@
             <a:r>
               <a:rPr sz="1600" b="0" i="0">
                 <a:solidFill>
-                  <a:srgbClr val="2B2B2B"/>
+                  <a:srgbClr val="26231F"/>
                 </a:solidFill>
               </a:rPr>
               <a:t>내용을 입력하세요</a:t>
@@ -4620,26 +4786,24 @@
       </p:sp>
       <p:sp>
         <p:nvSpPr>
-          <p:cNvPr id="13" name="카드 3"/>
+          <p:cNvPr id="15" name="카드 3"/>
           <p:cNvSpPr/>
           <p:nvPr/>
         </p:nvSpPr>
         <p:spPr>
           <a:xfrm>
-            <a:off x="8066836" y="3063240"/>
+            <a:off x="8066836" y="3246120"/>
             <a:ext cx="3484778" cy="3017520"/>
           </a:xfrm>
           <a:prstGeom prst="roundRect">
             <a:avLst>
-              <a:gd name="adj" fmla="val 8000"/>
+              <a:gd name="adj" fmla="val 7000"/>
             </a:avLst>
           </a:prstGeom>
-          <a:solidFill>
-            <a:srgbClr val="FBF1EE"/>
-          </a:solidFill>
+          <a:noFill/>
           <a:ln w="15875">
             <a:solidFill>
-              <a:srgbClr val="F5D4CC"/>
+              <a:srgbClr val="D88C79"/>
             </a:solidFill>
           </a:ln>
         </p:spPr>
@@ -4653,57 +4817,14 @@
       </p:sp>
       <p:sp>
         <p:nvSpPr>
-          <p:cNvPr id="14" name="번호 3"/>
-          <p:cNvSpPr/>
-          <p:nvPr/>
-        </p:nvSpPr>
-        <p:spPr>
-          <a:xfrm>
-            <a:off x="8249716" y="3246120"/>
-            <a:ext cx="457200" cy="457200"/>
-          </a:xfrm>
-          <a:prstGeom prst="ellipse">
-            <a:avLst/>
-          </a:prstGeom>
-          <a:solidFill>
-            <a:srgbClr val="AE4329"/>
-          </a:solidFill>
-          <a:ln>
-            <a:noFill/>
-          </a:ln>
-        </p:spPr>
-        <p:txBody>
-          <a:bodyPr rtlCol="0" anchor="ctr" wrap="square" lIns="54864" rIns="54864" tIns="27432" bIns="27432">
-            <a:noAutofit/>
-          </a:bodyPr>
-          <a:lstStyle/>
-          <a:p>
-            <a:pPr algn="ctr">
-              <a:lnSpc>
-                <a:spcPct val="100000"/>
-              </a:lnSpc>
-            </a:pPr>
-            <a:r>
-              <a:rPr sz="1600" b="1" i="0">
-                <a:solidFill>
-                  <a:srgbClr val="FFFFFF"/>
-                </a:solidFill>
-              </a:rPr>
-              <a:t>3</a:t>
-            </a:r>
-          </a:p>
-        </p:txBody>
-      </p:sp>
-      <p:sp>
-        <p:nvSpPr>
-          <p:cNvPr id="15" name="TextBox 14"/>
+          <p:cNvPr id="16" name="번호 3"/>
           <p:cNvSpPr txBox="1"/>
           <p:nvPr/>
         </p:nvSpPr>
         <p:spPr>
           <a:xfrm>
-            <a:off x="8203996" y="3840480"/>
-            <a:ext cx="3210458" cy="640080"/>
+            <a:off x="8158276" y="3383280"/>
+            <a:ext cx="914400" cy="548640"/>
           </a:xfrm>
           <a:prstGeom prst="rect">
             <a:avLst/>
@@ -4722,9 +4843,47 @@
               </a:lnSpc>
             </a:pPr>
             <a:r>
+              <a:rPr sz="2400" b="1" i="0">
+                <a:solidFill>
+                  <a:srgbClr val="D88C79"/>
+                </a:solidFill>
+              </a:rPr>
+              <a:t>03</a:t>
+            </a:r>
+          </a:p>
+        </p:txBody>
+      </p:sp>
+      <p:sp>
+        <p:nvSpPr>
+          <p:cNvPr id="17" name="TextBox 16"/>
+          <p:cNvSpPr txBox="1"/>
+          <p:nvPr/>
+        </p:nvSpPr>
+        <p:spPr>
+          <a:xfrm>
+            <a:off x="8203996" y="4023360"/>
+            <a:ext cx="3210458" cy="640080"/>
+          </a:xfrm>
+          <a:prstGeom prst="rect">
+            <a:avLst/>
+          </a:prstGeom>
+          <a:noFill/>
+        </p:spPr>
+        <p:txBody>
+          <a:bodyPr wrap="square" lIns="54864" rIns="54864" tIns="27432" bIns="27432" anchor="ctr">
+            <a:noAutofit/>
+          </a:bodyPr>
+          <a:lstStyle/>
+          <a:p>
+            <a:pPr algn="l">
+              <a:lnSpc>
+                <a:spcPct val="115000"/>
+              </a:lnSpc>
+            </a:pPr>
+            <a:r>
               <a:rPr sz="1800" b="1" i="0">
                 <a:solidFill>
-                  <a:srgbClr val="5B2315"/>
+                  <a:srgbClr val="492E27"/>
                 </a:solidFill>
               </a:rPr>
               <a:t>다음 목표</a:t>
@@ -4734,13 +4893,13 @@
       </p:sp>
       <p:sp>
         <p:nvSpPr>
-          <p:cNvPr id="16" name="TextBox 15"/>
+          <p:cNvPr id="18" name="TextBox 17"/>
           <p:cNvSpPr txBox="1"/>
           <p:nvPr/>
         </p:nvSpPr>
         <p:spPr>
           <a:xfrm>
-            <a:off x="8203996" y="4526280"/>
+            <a:off x="8203996" y="4709160"/>
             <a:ext cx="3210458" cy="1417319"/>
           </a:xfrm>
           <a:prstGeom prst="rect">
@@ -4762,7 +4921,7 @@
             <a:r>
               <a:rPr sz="1600" b="0" i="0">
                 <a:solidFill>
-                  <a:srgbClr val="2B2B2B"/>
+                  <a:srgbClr val="26231F"/>
                 </a:solidFill>
               </a:rPr>
               <a:t>내용을 입력하세요</a:t>
@@ -4777,7 +4936,7 @@
             <a:r>
               <a:rPr sz="1600" b="0" i="0">
                 <a:solidFill>
-                  <a:srgbClr val="2B2B2B"/>
+                  <a:srgbClr val="26231F"/>
                 </a:solidFill>
               </a:rPr>
               <a:t>내용을 입력하세요</a:t>
@@ -4799,7 +4958,7 @@
     <p:bg>
       <p:bgPr>
         <a:solidFill>
-          <a:srgbClr val="FBF1EE"/>
+          <a:srgbClr val="FBEFEC"/>
         </a:solidFill>
         <a:effectLst/>
       </p:bgPr>
@@ -4813,23 +4972,20 @@
       <p:grpSpPr/>
       <p:sp>
         <p:nvSpPr>
-          <p:cNvPr id="3" name="장식"/>
+          <p:cNvPr id="3" name="포인트"/>
           <p:cNvSpPr/>
           <p:nvPr/>
         </p:nvSpPr>
         <p:spPr>
-          <a:xfrm rot="10800000">
-            <a:off x="10637215" y="0"/>
-            <a:ext cx="914400" cy="1554480"/>
+          <a:xfrm>
+            <a:off x="5958687" y="246888"/>
+            <a:ext cx="274320" cy="274320"/>
           </a:xfrm>
           <a:prstGeom prst="round2SameRect">
-            <a:avLst>
-              <a:gd name="adj1" fmla="val 50000"/>
-              <a:gd name="adj2" fmla="val 0"/>
-            </a:avLst>
+            <a:avLst/>
           </a:prstGeom>
           <a:solidFill>
-            <a:srgbClr val="F5D4CC"/>
+            <a:srgbClr val="D88C79"/>
           </a:solidFill>
           <a:ln>
             <a:noFill/>
@@ -4840,6 +4996,73 @@
           <a:lstStyle/>
           <a:p>
             <a:pPr algn="ctr"/>
+          </a:p>
+        </p:txBody>
+      </p:sp>
+      <p:sp>
+        <p:nvSpPr>
+          <p:cNvPr id="4" name="장식"/>
+          <p:cNvSpPr/>
+          <p:nvPr/>
+        </p:nvSpPr>
+        <p:spPr>
+          <a:xfrm>
+            <a:off x="5684367" y="1572768"/>
+            <a:ext cx="822960" cy="22860"/>
+          </a:xfrm>
+          <a:prstGeom prst="rect">
+            <a:avLst/>
+          </a:prstGeom>
+          <a:solidFill>
+            <a:srgbClr val="D88C79"/>
+          </a:solidFill>
+          <a:ln>
+            <a:noFill/>
+          </a:ln>
+        </p:spPr>
+        <p:txBody>
+          <a:bodyPr rtlCol="0" anchor="ctr"/>
+          <a:lstStyle/>
+          <a:p>
+            <a:pPr algn="ctr"/>
+          </a:p>
+        </p:txBody>
+      </p:sp>
+      <p:sp>
+        <p:nvSpPr>
+          <p:cNvPr id="5" name="상단 라벨"/>
+          <p:cNvSpPr txBox="1"/>
+          <p:nvPr/>
+        </p:nvSpPr>
+        <p:spPr>
+          <a:xfrm>
+            <a:off x="640080" y="182880"/>
+            <a:ext cx="3657600" cy="274320"/>
+          </a:xfrm>
+          <a:prstGeom prst="rect">
+            <a:avLst/>
+          </a:prstGeom>
+          <a:noFill/>
+        </p:spPr>
+        <p:txBody>
+          <a:bodyPr wrap="square" lIns="54864" rIns="54864" tIns="27432" bIns="27432" anchor="ctr">
+            <a:noAutofit/>
+          </a:bodyPr>
+          <a:lstStyle/>
+          <a:p>
+            <a:pPr algn="l">
+              <a:lnSpc>
+                <a:spcPct val="115000"/>
+              </a:lnSpc>
+            </a:pPr>
+            <a:r>
+              <a:rPr sz="800" b="1" i="0" spc="250">
+                <a:solidFill>
+                  <a:srgbClr val="8E8780"/>
+                </a:solidFill>
+              </a:rPr>
+              <a:t>PRESENTATION</a:t>
+            </a:r>
           </a:p>
         </p:txBody>
       </p:sp>
@@ -4855,8 +5078,8 @@
         </p:nvSpPr>
         <p:spPr>
           <a:xfrm>
-            <a:off x="640080" y="457200"/>
-            <a:ext cx="9722815" cy="868680"/>
+            <a:off x="1371600" y="640080"/>
+            <a:ext cx="9448495" cy="868680"/>
           </a:xfrm>
         </p:spPr>
         <p:txBody>
@@ -4865,7 +5088,7 @@
           </a:bodyPr>
           <a:lstStyle/>
           <a:p>
-            <a:pPr algn="l">
+            <a:pPr algn="ctr">
               <a:lnSpc>
                 <a:spcPct val="105000"/>
               </a:lnSpc>
@@ -4873,7 +5096,7 @@
             <a:r>
               <a:rPr sz="3000" b="1" i="0">
                 <a:solidFill>
-                  <a:srgbClr val="5B2315"/>
+                  <a:srgbClr val="26231F"/>
                 </a:solidFill>
               </a:rPr>
               <a:t>한눈에 비교</a:t>
@@ -4883,26 +5106,24 @@
       </p:sp>
       <p:sp>
         <p:nvSpPr>
-          <p:cNvPr id="4" name="왼쪽 칸"/>
+          <p:cNvPr id="6" name="왼쪽 칸"/>
           <p:cNvSpPr/>
           <p:nvPr/>
         </p:nvSpPr>
         <p:spPr>
           <a:xfrm>
-            <a:off x="640080" y="1600200"/>
-            <a:ext cx="5272887" cy="4800600"/>
+            <a:off x="640080" y="1783080"/>
+            <a:ext cx="5272887" cy="3291840"/>
           </a:xfrm>
           <a:prstGeom prst="roundRect">
             <a:avLst>
-              <a:gd name="adj" fmla="val 8000"/>
+              <a:gd name="adj" fmla="val 7000"/>
             </a:avLst>
           </a:prstGeom>
-          <a:solidFill>
-            <a:srgbClr val="FBF1EE"/>
-          </a:solidFill>
-          <a:ln w="12700">
+          <a:noFill/>
+          <a:ln w="15875">
             <a:solidFill>
-              <a:srgbClr val="F5D4CC"/>
+              <a:srgbClr val="D88C79"/>
             </a:solidFill>
           </a:ln>
         </p:spPr>
@@ -4916,13 +5137,13 @@
       </p:sp>
       <p:sp>
         <p:nvSpPr>
-          <p:cNvPr id="5" name="칸 제목 바"/>
+          <p:cNvPr id="7" name="칸 제목 바"/>
           <p:cNvSpPr/>
           <p:nvPr/>
         </p:nvSpPr>
         <p:spPr>
           <a:xfrm>
-            <a:off x="640080" y="1600200"/>
+            <a:off x="640080" y="1783080"/>
             <a:ext cx="5272887" cy="640080"/>
           </a:xfrm>
           <a:prstGeom prst="roundRect">
@@ -4931,7 +5152,7 @@
             </a:avLst>
           </a:prstGeom>
           <a:solidFill>
-            <a:srgbClr val="AE4329"/>
+            <a:srgbClr val="D88C79"/>
           </a:solidFill>
           <a:ln>
             <a:noFill/>
@@ -4947,13 +5168,13 @@
       </p:sp>
       <p:sp>
         <p:nvSpPr>
-          <p:cNvPr id="6" name="TextBox 5"/>
+          <p:cNvPr id="8" name="TextBox 7"/>
           <p:cNvSpPr txBox="1"/>
           <p:nvPr/>
         </p:nvSpPr>
         <p:spPr>
           <a:xfrm>
-            <a:off x="822959" y="1600200"/>
+            <a:off x="822959" y="1783080"/>
             <a:ext cx="4907127" cy="640080"/>
           </a:xfrm>
           <a:prstGeom prst="rect">
@@ -4975,7 +5196,7 @@
             <a:r>
               <a:rPr sz="1800" b="1" i="0">
                 <a:solidFill>
-                  <a:srgbClr val="FFFFFF"/>
+                  <a:srgbClr val="26231F"/>
                 </a:solidFill>
               </a:rPr>
               <a:t>올해 초</a:t>
@@ -4985,14 +5206,14 @@
       </p:sp>
       <p:sp>
         <p:nvSpPr>
-          <p:cNvPr id="7" name="TextBox 6"/>
+          <p:cNvPr id="9" name="TextBox 8"/>
           <p:cNvSpPr txBox="1"/>
           <p:nvPr/>
         </p:nvSpPr>
         <p:spPr>
           <a:xfrm>
-            <a:off x="868680" y="2423160"/>
-            <a:ext cx="4815687" cy="3886200"/>
+            <a:off x="868680" y="2606040"/>
+            <a:ext cx="4815687" cy="2377440"/>
           </a:xfrm>
           <a:prstGeom prst="rect">
             <a:avLst/>
@@ -5018,7 +5239,7 @@
             <a:r>
               <a:rPr sz="1500" b="0" i="0">
                 <a:solidFill>
-                  <a:srgbClr val="2B2B2B"/>
+                  <a:srgbClr val="26231F"/>
                 </a:solidFill>
               </a:rPr>
               <a:t>내용을 입력하세요</a:t>
@@ -5038,7 +5259,7 @@
             <a:r>
               <a:rPr sz="1500" b="0" i="0">
                 <a:solidFill>
-                  <a:srgbClr val="2B2B2B"/>
+                  <a:srgbClr val="26231F"/>
                 </a:solidFill>
               </a:rPr>
               <a:t>내용을 입력하세요</a:t>
@@ -5058,7 +5279,7 @@
             <a:r>
               <a:rPr sz="1500" b="0" i="0">
                 <a:solidFill>
-                  <a:srgbClr val="2B2B2B"/>
+                  <a:srgbClr val="26231F"/>
                 </a:solidFill>
               </a:rPr>
               <a:t>내용을 입력하세요</a:t>
@@ -5068,26 +5289,24 @@
       </p:sp>
       <p:sp>
         <p:nvSpPr>
-          <p:cNvPr id="8" name="오른쪽 칸"/>
+          <p:cNvPr id="10" name="오른쪽 칸"/>
           <p:cNvSpPr/>
           <p:nvPr/>
         </p:nvSpPr>
         <p:spPr>
           <a:xfrm>
-            <a:off x="6278727" y="1600200"/>
-            <a:ext cx="5272887" cy="4800600"/>
+            <a:off x="6278727" y="1783080"/>
+            <a:ext cx="5272887" cy="3291840"/>
           </a:xfrm>
           <a:prstGeom prst="roundRect">
             <a:avLst>
-              <a:gd name="adj" fmla="val 8000"/>
+              <a:gd name="adj" fmla="val 7000"/>
             </a:avLst>
           </a:prstGeom>
-          <a:solidFill>
-            <a:srgbClr val="F5D4CC"/>
-          </a:solidFill>
-          <a:ln w="12700">
+          <a:noFill/>
+          <a:ln w="15875">
             <a:solidFill>
-              <a:srgbClr val="F5D4CC"/>
+              <a:srgbClr val="D88C79"/>
             </a:solidFill>
           </a:ln>
         </p:spPr>
@@ -5101,13 +5320,13 @@
       </p:sp>
       <p:sp>
         <p:nvSpPr>
-          <p:cNvPr id="9" name="칸 제목 바"/>
+          <p:cNvPr id="11" name="칸 제목 바"/>
           <p:cNvSpPr/>
           <p:nvPr/>
         </p:nvSpPr>
         <p:spPr>
           <a:xfrm>
-            <a:off x="6278727" y="1600200"/>
+            <a:off x="6278727" y="1783080"/>
             <a:ext cx="5272887" cy="640080"/>
           </a:xfrm>
           <a:prstGeom prst="roundRect">
@@ -5116,7 +5335,7 @@
             </a:avLst>
           </a:prstGeom>
           <a:solidFill>
-            <a:srgbClr val="5B2315"/>
+            <a:srgbClr val="492E27"/>
           </a:solidFill>
           <a:ln>
             <a:noFill/>
@@ -5132,13 +5351,13 @@
       </p:sp>
       <p:sp>
         <p:nvSpPr>
-          <p:cNvPr id="10" name="TextBox 9"/>
+          <p:cNvPr id="12" name="TextBox 11"/>
           <p:cNvSpPr txBox="1"/>
           <p:nvPr/>
         </p:nvSpPr>
         <p:spPr>
           <a:xfrm>
-            <a:off x="6461607" y="1600200"/>
+            <a:off x="6461607" y="1783080"/>
             <a:ext cx="4907127" cy="640080"/>
           </a:xfrm>
           <a:prstGeom prst="rect">
@@ -5170,14 +5389,14 @@
       </p:sp>
       <p:sp>
         <p:nvSpPr>
-          <p:cNvPr id="11" name="TextBox 10"/>
+          <p:cNvPr id="13" name="TextBox 12"/>
           <p:cNvSpPr txBox="1"/>
           <p:nvPr/>
         </p:nvSpPr>
         <p:spPr>
           <a:xfrm>
-            <a:off x="6507327" y="2423160"/>
-            <a:ext cx="4815687" cy="3886200"/>
+            <a:off x="6507327" y="2606040"/>
+            <a:ext cx="4815687" cy="2377440"/>
           </a:xfrm>
           <a:prstGeom prst="rect">
             <a:avLst/>
@@ -5203,7 +5422,7 @@
             <a:r>
               <a:rPr sz="1500" b="0" i="0">
                 <a:solidFill>
-                  <a:srgbClr val="2B2B2B"/>
+                  <a:srgbClr val="26231F"/>
                 </a:solidFill>
               </a:rPr>
               <a:t>내용을 입력하세요</a:t>
@@ -5223,7 +5442,7 @@
             <a:r>
               <a:rPr sz="1500" b="0" i="0">
                 <a:solidFill>
-                  <a:srgbClr val="2B2B2B"/>
+                  <a:srgbClr val="26231F"/>
                 </a:solidFill>
               </a:rPr>
               <a:t>내용을 입력하세요</a:t>
@@ -5243,7 +5462,7 @@
             <a:r>
               <a:rPr sz="1500" b="0" i="0">
                 <a:solidFill>
-                  <a:srgbClr val="2B2B2B"/>
+                  <a:srgbClr val="26231F"/>
                 </a:solidFill>
               </a:rPr>
               <a:t>내용을 입력하세요</a:t>
@@ -5265,7 +5484,7 @@
     <p:bg>
       <p:bgPr>
         <a:solidFill>
-          <a:srgbClr val="FBF1EE"/>
+          <a:srgbClr val="FBEFEC"/>
         </a:solidFill>
         <a:effectLst/>
       </p:bgPr>
@@ -5279,23 +5498,20 @@
       <p:grpSpPr/>
       <p:sp>
         <p:nvSpPr>
-          <p:cNvPr id="3" name="장식"/>
+          <p:cNvPr id="3" name="포인트"/>
           <p:cNvSpPr/>
           <p:nvPr/>
         </p:nvSpPr>
         <p:spPr>
-          <a:xfrm rot="10800000">
-            <a:off x="10637215" y="0"/>
-            <a:ext cx="914400" cy="1554480"/>
+          <a:xfrm>
+            <a:off x="5958687" y="246888"/>
+            <a:ext cx="274320" cy="274320"/>
           </a:xfrm>
           <a:prstGeom prst="round2SameRect">
-            <a:avLst>
-              <a:gd name="adj1" fmla="val 50000"/>
-              <a:gd name="adj2" fmla="val 0"/>
-            </a:avLst>
+            <a:avLst/>
           </a:prstGeom>
           <a:solidFill>
-            <a:srgbClr val="F5D4CC"/>
+            <a:srgbClr val="D88C79"/>
           </a:solidFill>
           <a:ln>
             <a:noFill/>
@@ -5306,6 +5522,73 @@
           <a:lstStyle/>
           <a:p>
             <a:pPr algn="ctr"/>
+          </a:p>
+        </p:txBody>
+      </p:sp>
+      <p:sp>
+        <p:nvSpPr>
+          <p:cNvPr id="4" name="장식"/>
+          <p:cNvSpPr/>
+          <p:nvPr/>
+        </p:nvSpPr>
+        <p:spPr>
+          <a:xfrm>
+            <a:off x="5684367" y="1572768"/>
+            <a:ext cx="822960" cy="22860"/>
+          </a:xfrm>
+          <a:prstGeom prst="rect">
+            <a:avLst/>
+          </a:prstGeom>
+          <a:solidFill>
+            <a:srgbClr val="D88C79"/>
+          </a:solidFill>
+          <a:ln>
+            <a:noFill/>
+          </a:ln>
+        </p:spPr>
+        <p:txBody>
+          <a:bodyPr rtlCol="0" anchor="ctr"/>
+          <a:lstStyle/>
+          <a:p>
+            <a:pPr algn="ctr"/>
+          </a:p>
+        </p:txBody>
+      </p:sp>
+      <p:sp>
+        <p:nvSpPr>
+          <p:cNvPr id="5" name="상단 라벨"/>
+          <p:cNvSpPr txBox="1"/>
+          <p:nvPr/>
+        </p:nvSpPr>
+        <p:spPr>
+          <a:xfrm>
+            <a:off x="640080" y="182880"/>
+            <a:ext cx="3657600" cy="274320"/>
+          </a:xfrm>
+          <a:prstGeom prst="rect">
+            <a:avLst/>
+          </a:prstGeom>
+          <a:noFill/>
+        </p:spPr>
+        <p:txBody>
+          <a:bodyPr wrap="square" lIns="54864" rIns="54864" tIns="27432" bIns="27432" anchor="ctr">
+            <a:noAutofit/>
+          </a:bodyPr>
+          <a:lstStyle/>
+          <a:p>
+            <a:pPr algn="l">
+              <a:lnSpc>
+                <a:spcPct val="115000"/>
+              </a:lnSpc>
+            </a:pPr>
+            <a:r>
+              <a:rPr sz="800" b="1" i="0" spc="250">
+                <a:solidFill>
+                  <a:srgbClr val="8E8780"/>
+                </a:solidFill>
+              </a:rPr>
+              <a:t>PRESENTATION</a:t>
+            </a:r>
           </a:p>
         </p:txBody>
       </p:sp>
@@ -5321,8 +5604,8 @@
         </p:nvSpPr>
         <p:spPr>
           <a:xfrm>
-            <a:off x="640080" y="457200"/>
-            <a:ext cx="9722815" cy="868680"/>
+            <a:off x="1371600" y="640080"/>
+            <a:ext cx="9448495" cy="868680"/>
           </a:xfrm>
         </p:spPr>
         <p:txBody>
@@ -5331,7 +5614,7 @@
           </a:bodyPr>
           <a:lstStyle/>
           <a:p>
-            <a:pPr algn="l">
+            <a:pPr algn="ctr">
               <a:lnSpc>
                 <a:spcPct val="105000"/>
               </a:lnSpc>
@@ -5339,7 +5622,7 @@
             <a:r>
               <a:rPr sz="3000" b="1" i="0">
                 <a:solidFill>
-                  <a:srgbClr val="5B2315"/>
+                  <a:srgbClr val="26231F"/>
                 </a:solidFill>
               </a:rPr>
               <a:t>일정·현황</a:t>
@@ -5349,14 +5632,14 @@
       </p:sp>
       <p:graphicFrame>
         <p:nvGraphicFramePr>
-          <p:cNvPr id="4" name="표"/>
+          <p:cNvPr id="6" name="표"/>
           <p:cNvGraphicFramePr>
             <a:graphicFrameLocks noGrp="1"/>
           </p:cNvGraphicFramePr>
           <p:nvPr/>
         </p:nvGraphicFramePr>
         <p:xfrm>
-          <a:off x="640080" y="1600200"/>
+          <a:off x="640080" y="1783080"/>
           <a:ext cx="10911532" cy="3840480"/>
         </p:xfrm>
         <a:graphic>
@@ -5381,7 +5664,7 @@
                       <a:r>
                         <a:rPr sz="1500" b="1">
                           <a:solidFill>
-                            <a:srgbClr val="FFFFFF"/>
+                            <a:srgbClr val="26231F"/>
                           </a:solidFill>
                         </a:rPr>
                         <a:t>월</a:t>
@@ -5391,30 +5674,30 @@
                   <a:tcPr anchor="ctr" marL="73152" marR="73152">
                     <a:lnL w="9525" cap="flat" cmpd="sng" algn="ctr">
                       <a:solidFill>
-                        <a:srgbClr val="AE4329"/>
+                        <a:srgbClr val="D88C79"/>
                       </a:solidFill>
                       <a:prstDash val="solid"/>
                     </a:lnL>
                     <a:lnR w="9525" cap="flat" cmpd="sng" algn="ctr">
                       <a:solidFill>
-                        <a:srgbClr val="AE4329"/>
+                        <a:srgbClr val="D88C79"/>
                       </a:solidFill>
                       <a:prstDash val="solid"/>
                     </a:lnR>
                     <a:lnT w="9525" cap="flat" cmpd="sng" algn="ctr">
                       <a:solidFill>
-                        <a:srgbClr val="AE4329"/>
+                        <a:srgbClr val="D88C79"/>
                       </a:solidFill>
                       <a:prstDash val="solid"/>
                     </a:lnT>
                     <a:lnB w="9525" cap="flat" cmpd="sng" algn="ctr">
                       <a:solidFill>
-                        <a:srgbClr val="AE4329"/>
+                        <a:srgbClr val="D88C79"/>
                       </a:solidFill>
                       <a:prstDash val="solid"/>
                     </a:lnB>
                     <a:solidFill>
-                      <a:srgbClr val="AE4329"/>
+                      <a:srgbClr val="D88C79"/>
                     </a:solidFill>
                   </a:tcPr>
                 </a:tc>
@@ -5427,7 +5710,7 @@
                       <a:r>
                         <a:rPr sz="1500" b="1">
                           <a:solidFill>
-                            <a:srgbClr val="FFFFFF"/>
+                            <a:srgbClr val="26231F"/>
                           </a:solidFill>
                         </a:rPr>
                         <a:t>한 일</a:t>
@@ -5437,30 +5720,30 @@
                   <a:tcPr anchor="ctr" marL="73152" marR="73152">
                     <a:lnL w="9525" cap="flat" cmpd="sng" algn="ctr">
                       <a:solidFill>
-                        <a:srgbClr val="AE4329"/>
+                        <a:srgbClr val="D88C79"/>
                       </a:solidFill>
                       <a:prstDash val="solid"/>
                     </a:lnL>
                     <a:lnR w="9525" cap="flat" cmpd="sng" algn="ctr">
                       <a:solidFill>
-                        <a:srgbClr val="AE4329"/>
+                        <a:srgbClr val="D88C79"/>
                       </a:solidFill>
                       <a:prstDash val="solid"/>
                     </a:lnR>
                     <a:lnT w="9525" cap="flat" cmpd="sng" algn="ctr">
                       <a:solidFill>
-                        <a:srgbClr val="AE4329"/>
+                        <a:srgbClr val="D88C79"/>
                       </a:solidFill>
                       <a:prstDash val="solid"/>
                     </a:lnT>
                     <a:lnB w="9525" cap="flat" cmpd="sng" algn="ctr">
                       <a:solidFill>
-                        <a:srgbClr val="AE4329"/>
+                        <a:srgbClr val="D88C79"/>
                       </a:solidFill>
                       <a:prstDash val="solid"/>
                     </a:lnB>
                     <a:solidFill>
-                      <a:srgbClr val="AE4329"/>
+                      <a:srgbClr val="D88C79"/>
                     </a:solidFill>
                   </a:tcPr>
                 </a:tc>
@@ -5473,7 +5756,7 @@
                       <a:r>
                         <a:rPr sz="1500" b="1">
                           <a:solidFill>
-                            <a:srgbClr val="FFFFFF"/>
+                            <a:srgbClr val="26231F"/>
                           </a:solidFill>
                         </a:rPr>
                         <a:t>배운 점</a:t>
@@ -5483,30 +5766,30 @@
                   <a:tcPr anchor="ctr" marL="73152" marR="73152">
                     <a:lnL w="9525" cap="flat" cmpd="sng" algn="ctr">
                       <a:solidFill>
-                        <a:srgbClr val="AE4329"/>
+                        <a:srgbClr val="D88C79"/>
                       </a:solidFill>
                       <a:prstDash val="solid"/>
                     </a:lnL>
                     <a:lnR w="9525" cap="flat" cmpd="sng" algn="ctr">
                       <a:solidFill>
-                        <a:srgbClr val="AE4329"/>
+                        <a:srgbClr val="D88C79"/>
                       </a:solidFill>
                       <a:prstDash val="solid"/>
                     </a:lnR>
                     <a:lnT w="9525" cap="flat" cmpd="sng" algn="ctr">
                       <a:solidFill>
-                        <a:srgbClr val="AE4329"/>
+                        <a:srgbClr val="D88C79"/>
                       </a:solidFill>
                       <a:prstDash val="solid"/>
                     </a:lnT>
                     <a:lnB w="9525" cap="flat" cmpd="sng" algn="ctr">
                       <a:solidFill>
-                        <a:srgbClr val="AE4329"/>
+                        <a:srgbClr val="D88C79"/>
                       </a:solidFill>
                       <a:prstDash val="solid"/>
                     </a:lnB>
                     <a:solidFill>
-                      <a:srgbClr val="AE4329"/>
+                      <a:srgbClr val="D88C79"/>
                     </a:solidFill>
                   </a:tcPr>
                 </a:tc>
@@ -5519,7 +5802,7 @@
                       <a:r>
                         <a:rPr sz="1500" b="1">
                           <a:solidFill>
-                            <a:srgbClr val="FFFFFF"/>
+                            <a:srgbClr val="26231F"/>
                           </a:solidFill>
                         </a:rPr>
                         <a:t>점수</a:t>
@@ -5529,30 +5812,30 @@
                   <a:tcPr anchor="ctr" marL="73152" marR="73152">
                     <a:lnL w="9525" cap="flat" cmpd="sng" algn="ctr">
                       <a:solidFill>
-                        <a:srgbClr val="AE4329"/>
+                        <a:srgbClr val="D88C79"/>
                       </a:solidFill>
                       <a:prstDash val="solid"/>
                     </a:lnL>
                     <a:lnR w="9525" cap="flat" cmpd="sng" algn="ctr">
                       <a:solidFill>
-                        <a:srgbClr val="AE4329"/>
+                        <a:srgbClr val="D88C79"/>
                       </a:solidFill>
                       <a:prstDash val="solid"/>
                     </a:lnR>
                     <a:lnT w="9525" cap="flat" cmpd="sng" algn="ctr">
                       <a:solidFill>
-                        <a:srgbClr val="AE4329"/>
+                        <a:srgbClr val="D88C79"/>
                       </a:solidFill>
                       <a:prstDash val="solid"/>
                     </a:lnT>
                     <a:lnB w="9525" cap="flat" cmpd="sng" algn="ctr">
                       <a:solidFill>
-                        <a:srgbClr val="AE4329"/>
+                        <a:srgbClr val="D88C79"/>
                       </a:solidFill>
                       <a:prstDash val="solid"/>
                     </a:lnB>
                     <a:solidFill>
-                      <a:srgbClr val="AE4329"/>
+                      <a:srgbClr val="D88C79"/>
                     </a:solidFill>
                   </a:tcPr>
                 </a:tc>
@@ -5567,7 +5850,7 @@
                       <a:r>
                         <a:rPr sz="1500" b="1">
                           <a:solidFill>
-                            <a:srgbClr val="5B2315"/>
+                            <a:srgbClr val="492E27"/>
                           </a:solidFill>
                         </a:rPr>
                         <a:t>1</a:t>
@@ -5577,30 +5860,30 @@
                   <a:tcPr anchor="ctr" marL="73152" marR="73152">
                     <a:lnL w="9525" cap="flat" cmpd="sng" algn="ctr">
                       <a:solidFill>
-                        <a:srgbClr val="F5D4CC"/>
+                        <a:srgbClr val="F6DCD5"/>
                       </a:solidFill>
                       <a:prstDash val="solid"/>
                     </a:lnL>
                     <a:lnR w="9525" cap="flat" cmpd="sng" algn="ctr">
                       <a:solidFill>
-                        <a:srgbClr val="F5D4CC"/>
+                        <a:srgbClr val="F6DCD5"/>
                       </a:solidFill>
                       <a:prstDash val="solid"/>
                     </a:lnR>
                     <a:lnT w="9525" cap="flat" cmpd="sng" algn="ctr">
                       <a:solidFill>
-                        <a:srgbClr val="F5D4CC"/>
+                        <a:srgbClr val="F6DCD5"/>
                       </a:solidFill>
                       <a:prstDash val="solid"/>
                     </a:lnT>
                     <a:lnB w="9525" cap="flat" cmpd="sng" algn="ctr">
                       <a:solidFill>
-                        <a:srgbClr val="F5D4CC"/>
+                        <a:srgbClr val="F6DCD5"/>
                       </a:solidFill>
                       <a:prstDash val="solid"/>
                     </a:lnB>
                     <a:solidFill>
-                      <a:srgbClr val="F5D4CC"/>
+                      <a:srgbClr val="F6DCD5"/>
                     </a:solidFill>
                   </a:tcPr>
                 </a:tc>
@@ -5613,7 +5896,7 @@
                       <a:r>
                         <a:rPr sz="1500" b="0">
                           <a:solidFill>
-                            <a:srgbClr val="2B2B2B"/>
+                            <a:srgbClr val="26231F"/>
                           </a:solidFill>
                         </a:rPr>
                         <a:t>내용 입력</a:t>
@@ -5623,25 +5906,25 @@
                   <a:tcPr anchor="ctr" marL="73152" marR="73152">
                     <a:lnL w="9525" cap="flat" cmpd="sng" algn="ctr">
                       <a:solidFill>
-                        <a:srgbClr val="F5D4CC"/>
+                        <a:srgbClr val="F6DCD5"/>
                       </a:solidFill>
                       <a:prstDash val="solid"/>
                     </a:lnL>
                     <a:lnR w="9525" cap="flat" cmpd="sng" algn="ctr">
                       <a:solidFill>
-                        <a:srgbClr val="F5D4CC"/>
+                        <a:srgbClr val="F6DCD5"/>
                       </a:solidFill>
                       <a:prstDash val="solid"/>
                     </a:lnR>
                     <a:lnT w="9525" cap="flat" cmpd="sng" algn="ctr">
                       <a:solidFill>
-                        <a:srgbClr val="F5D4CC"/>
+                        <a:srgbClr val="F6DCD5"/>
                       </a:solidFill>
                       <a:prstDash val="solid"/>
                     </a:lnT>
                     <a:lnB w="9525" cap="flat" cmpd="sng" algn="ctr">
                       <a:solidFill>
-                        <a:srgbClr val="F5D4CC"/>
+                        <a:srgbClr val="F6DCD5"/>
                       </a:solidFill>
                       <a:prstDash val="solid"/>
                     </a:lnB>
@@ -5659,7 +5942,7 @@
                       <a:r>
                         <a:rPr sz="1500" b="0">
                           <a:solidFill>
-                            <a:srgbClr val="2B2B2B"/>
+                            <a:srgbClr val="26231F"/>
                           </a:solidFill>
                         </a:rPr>
                         <a:t/>
@@ -5669,25 +5952,25 @@
                   <a:tcPr anchor="ctr" marL="73152" marR="73152">
                     <a:lnL w="9525" cap="flat" cmpd="sng" algn="ctr">
                       <a:solidFill>
-                        <a:srgbClr val="F5D4CC"/>
+                        <a:srgbClr val="F6DCD5"/>
                       </a:solidFill>
                       <a:prstDash val="solid"/>
                     </a:lnL>
                     <a:lnR w="9525" cap="flat" cmpd="sng" algn="ctr">
                       <a:solidFill>
-                        <a:srgbClr val="F5D4CC"/>
+                        <a:srgbClr val="F6DCD5"/>
                       </a:solidFill>
                       <a:prstDash val="solid"/>
                     </a:lnR>
                     <a:lnT w="9525" cap="flat" cmpd="sng" algn="ctr">
                       <a:solidFill>
-                        <a:srgbClr val="F5D4CC"/>
+                        <a:srgbClr val="F6DCD5"/>
                       </a:solidFill>
                       <a:prstDash val="solid"/>
                     </a:lnT>
                     <a:lnB w="9525" cap="flat" cmpd="sng" algn="ctr">
                       <a:solidFill>
-                        <a:srgbClr val="F5D4CC"/>
+                        <a:srgbClr val="F6DCD5"/>
                       </a:solidFill>
                       <a:prstDash val="solid"/>
                     </a:lnB>
@@ -5705,7 +5988,7 @@
                       <a:r>
                         <a:rPr sz="1500" b="0">
                           <a:solidFill>
-                            <a:srgbClr val="2B2B2B"/>
+                            <a:srgbClr val="26231F"/>
                           </a:solidFill>
                         </a:rPr>
                         <a:t/>
@@ -5715,25 +5998,25 @@
                   <a:tcPr anchor="ctr" marL="73152" marR="73152">
                     <a:lnL w="9525" cap="flat" cmpd="sng" algn="ctr">
                       <a:solidFill>
-                        <a:srgbClr val="F5D4CC"/>
+                        <a:srgbClr val="F6DCD5"/>
                       </a:solidFill>
                       <a:prstDash val="solid"/>
                     </a:lnL>
                     <a:lnR w="9525" cap="flat" cmpd="sng" algn="ctr">
                       <a:solidFill>
-                        <a:srgbClr val="F5D4CC"/>
+                        <a:srgbClr val="F6DCD5"/>
                       </a:solidFill>
                       <a:prstDash val="solid"/>
                     </a:lnR>
                     <a:lnT w="9525" cap="flat" cmpd="sng" algn="ctr">
                       <a:solidFill>
-                        <a:srgbClr val="F5D4CC"/>
+                        <a:srgbClr val="F6DCD5"/>
                       </a:solidFill>
                       <a:prstDash val="solid"/>
                     </a:lnT>
                     <a:lnB w="9525" cap="flat" cmpd="sng" algn="ctr">
                       <a:solidFill>
-                        <a:srgbClr val="F5D4CC"/>
+                        <a:srgbClr val="F6DCD5"/>
                       </a:solidFill>
                       <a:prstDash val="solid"/>
                     </a:lnB>
@@ -5753,7 +6036,7 @@
                       <a:r>
                         <a:rPr sz="1500" b="1">
                           <a:solidFill>
-                            <a:srgbClr val="5B2315"/>
+                            <a:srgbClr val="492E27"/>
                           </a:solidFill>
                         </a:rPr>
                         <a:t>2</a:t>
@@ -5763,30 +6046,30 @@
                   <a:tcPr anchor="ctr" marL="73152" marR="73152">
                     <a:lnL w="9525" cap="flat" cmpd="sng" algn="ctr">
                       <a:solidFill>
-                        <a:srgbClr val="F5D4CC"/>
+                        <a:srgbClr val="F6DCD5"/>
                       </a:solidFill>
                       <a:prstDash val="solid"/>
                     </a:lnL>
                     <a:lnR w="9525" cap="flat" cmpd="sng" algn="ctr">
                       <a:solidFill>
-                        <a:srgbClr val="F5D4CC"/>
+                        <a:srgbClr val="F6DCD5"/>
                       </a:solidFill>
                       <a:prstDash val="solid"/>
                     </a:lnR>
                     <a:lnT w="9525" cap="flat" cmpd="sng" algn="ctr">
                       <a:solidFill>
-                        <a:srgbClr val="F5D4CC"/>
+                        <a:srgbClr val="F6DCD5"/>
                       </a:solidFill>
                       <a:prstDash val="solid"/>
                     </a:lnT>
                     <a:lnB w="9525" cap="flat" cmpd="sng" algn="ctr">
                       <a:solidFill>
-                        <a:srgbClr val="F5D4CC"/>
+                        <a:srgbClr val="F6DCD5"/>
                       </a:solidFill>
                       <a:prstDash val="solid"/>
                     </a:lnB>
                     <a:solidFill>
-                      <a:srgbClr val="F5D4CC"/>
+                      <a:srgbClr val="F6DCD5"/>
                     </a:solidFill>
                   </a:tcPr>
                 </a:tc>
@@ -5799,7 +6082,7 @@
                       <a:r>
                         <a:rPr sz="1500" b="0">
                           <a:solidFill>
-                            <a:srgbClr val="2B2B2B"/>
+                            <a:srgbClr val="26231F"/>
                           </a:solidFill>
                         </a:rPr>
                         <a:t>내용 입력</a:t>
@@ -5809,30 +6092,30 @@
                   <a:tcPr anchor="ctr" marL="73152" marR="73152">
                     <a:lnL w="9525" cap="flat" cmpd="sng" algn="ctr">
                       <a:solidFill>
-                        <a:srgbClr val="F5D4CC"/>
+                        <a:srgbClr val="F6DCD5"/>
                       </a:solidFill>
                       <a:prstDash val="solid"/>
                     </a:lnL>
                     <a:lnR w="9525" cap="flat" cmpd="sng" algn="ctr">
                       <a:solidFill>
-                        <a:srgbClr val="F5D4CC"/>
+                        <a:srgbClr val="F6DCD5"/>
                       </a:solidFill>
                       <a:prstDash val="solid"/>
                     </a:lnR>
                     <a:lnT w="9525" cap="flat" cmpd="sng" algn="ctr">
                       <a:solidFill>
-                        <a:srgbClr val="F5D4CC"/>
+                        <a:srgbClr val="F6DCD5"/>
                       </a:solidFill>
                       <a:prstDash val="solid"/>
                     </a:lnT>
                     <a:lnB w="9525" cap="flat" cmpd="sng" algn="ctr">
                       <a:solidFill>
-                        <a:srgbClr val="F5D4CC"/>
+                        <a:srgbClr val="F6DCD5"/>
                       </a:solidFill>
                       <a:prstDash val="solid"/>
                     </a:lnB>
                     <a:solidFill>
-                      <a:srgbClr val="FBF1EE"/>
+                      <a:srgbClr val="FBEFEC"/>
                     </a:solidFill>
                   </a:tcPr>
                 </a:tc>
@@ -5845,7 +6128,7 @@
                       <a:r>
                         <a:rPr sz="1500" b="0">
                           <a:solidFill>
-                            <a:srgbClr val="2B2B2B"/>
+                            <a:srgbClr val="26231F"/>
                           </a:solidFill>
                         </a:rPr>
                         <a:t/>
@@ -5855,30 +6138,30 @@
                   <a:tcPr anchor="ctr" marL="73152" marR="73152">
                     <a:lnL w="9525" cap="flat" cmpd="sng" algn="ctr">
                       <a:solidFill>
-                        <a:srgbClr val="F5D4CC"/>
+                        <a:srgbClr val="F6DCD5"/>
                       </a:solidFill>
                       <a:prstDash val="solid"/>
                     </a:lnL>
                     <a:lnR w="9525" cap="flat" cmpd="sng" algn="ctr">
                       <a:solidFill>
-                        <a:srgbClr val="F5D4CC"/>
+                        <a:srgbClr val="F6DCD5"/>
                       </a:solidFill>
                       <a:prstDash val="solid"/>
                     </a:lnR>
                     <a:lnT w="9525" cap="flat" cmpd="sng" algn="ctr">
                       <a:solidFill>
-                        <a:srgbClr val="F5D4CC"/>
+                        <a:srgbClr val="F6DCD5"/>
                       </a:solidFill>
                       <a:prstDash val="solid"/>
                     </a:lnT>
                     <a:lnB w="9525" cap="flat" cmpd="sng" algn="ctr">
                       <a:solidFill>
-                        <a:srgbClr val="F5D4CC"/>
+                        <a:srgbClr val="F6DCD5"/>
                       </a:solidFill>
                       <a:prstDash val="solid"/>
                     </a:lnB>
                     <a:solidFill>
-                      <a:srgbClr val="FBF1EE"/>
+                      <a:srgbClr val="FBEFEC"/>
                     </a:solidFill>
                   </a:tcPr>
                 </a:tc>
@@ -5891,7 +6174,7 @@
                       <a:r>
                         <a:rPr sz="1500" b="0">
                           <a:solidFill>
-                            <a:srgbClr val="2B2B2B"/>
+                            <a:srgbClr val="26231F"/>
                           </a:solidFill>
                         </a:rPr>
                         <a:t/>
@@ -5901,30 +6184,30 @@
                   <a:tcPr anchor="ctr" marL="73152" marR="73152">
                     <a:lnL w="9525" cap="flat" cmpd="sng" algn="ctr">
                       <a:solidFill>
-                        <a:srgbClr val="F5D4CC"/>
+                        <a:srgbClr val="F6DCD5"/>
                       </a:solidFill>
                       <a:prstDash val="solid"/>
                     </a:lnL>
                     <a:lnR w="9525" cap="flat" cmpd="sng" algn="ctr">
                       <a:solidFill>
-                        <a:srgbClr val="F5D4CC"/>
+                        <a:srgbClr val="F6DCD5"/>
                       </a:solidFill>
                       <a:prstDash val="solid"/>
                     </a:lnR>
                     <a:lnT w="9525" cap="flat" cmpd="sng" algn="ctr">
                       <a:solidFill>
-                        <a:srgbClr val="F5D4CC"/>
+                        <a:srgbClr val="F6DCD5"/>
                       </a:solidFill>
                       <a:prstDash val="solid"/>
                     </a:lnT>
                     <a:lnB w="9525" cap="flat" cmpd="sng" algn="ctr">
                       <a:solidFill>
-                        <a:srgbClr val="F5D4CC"/>
+                        <a:srgbClr val="F6DCD5"/>
                       </a:solidFill>
                       <a:prstDash val="solid"/>
                     </a:lnB>
                     <a:solidFill>
-                      <a:srgbClr val="FBF1EE"/>
+                      <a:srgbClr val="FBEFEC"/>
                     </a:solidFill>
                   </a:tcPr>
                 </a:tc>
@@ -5939,7 +6222,7 @@
                       <a:r>
                         <a:rPr sz="1500" b="1">
                           <a:solidFill>
-                            <a:srgbClr val="5B2315"/>
+                            <a:srgbClr val="492E27"/>
                           </a:solidFill>
                         </a:rPr>
                         <a:t>3</a:t>
@@ -5949,30 +6232,30 @@
                   <a:tcPr anchor="ctr" marL="73152" marR="73152">
                     <a:lnL w="9525" cap="flat" cmpd="sng" algn="ctr">
                       <a:solidFill>
-                        <a:srgbClr val="F5D4CC"/>
+                        <a:srgbClr val="F6DCD5"/>
                       </a:solidFill>
                       <a:prstDash val="solid"/>
                     </a:lnL>
                     <a:lnR w="9525" cap="flat" cmpd="sng" algn="ctr">
                       <a:solidFill>
-                        <a:srgbClr val="F5D4CC"/>
+                        <a:srgbClr val="F6DCD5"/>
                       </a:solidFill>
                       <a:prstDash val="solid"/>
                     </a:lnR>
                     <a:lnT w="9525" cap="flat" cmpd="sng" algn="ctr">
                       <a:solidFill>
-                        <a:srgbClr val="F5D4CC"/>
+                        <a:srgbClr val="F6DCD5"/>
                       </a:solidFill>
                       <a:prstDash val="solid"/>
                     </a:lnT>
                     <a:lnB w="9525" cap="flat" cmpd="sng" algn="ctr">
                       <a:solidFill>
-                        <a:srgbClr val="F5D4CC"/>
+                        <a:srgbClr val="F6DCD5"/>
                       </a:solidFill>
                       <a:prstDash val="solid"/>
                     </a:lnB>
                     <a:solidFill>
-                      <a:srgbClr val="F5D4CC"/>
+                      <a:srgbClr val="F6DCD5"/>
                     </a:solidFill>
                   </a:tcPr>
                 </a:tc>
@@ -5985,7 +6268,7 @@
                       <a:r>
                         <a:rPr sz="1500" b="0">
                           <a:solidFill>
-                            <a:srgbClr val="2B2B2B"/>
+                            <a:srgbClr val="26231F"/>
                           </a:solidFill>
                         </a:rPr>
                         <a:t>내용 입력</a:t>
@@ -5995,25 +6278,25 @@
                   <a:tcPr anchor="ctr" marL="73152" marR="73152">
                     <a:lnL w="9525" cap="flat" cmpd="sng" algn="ctr">
                       <a:solidFill>
-                        <a:srgbClr val="F5D4CC"/>
+                        <a:srgbClr val="F6DCD5"/>
                       </a:solidFill>
                       <a:prstDash val="solid"/>
                     </a:lnL>
                     <a:lnR w="9525" cap="flat" cmpd="sng" algn="ctr">
                       <a:solidFill>
-                        <a:srgbClr val="F5D4CC"/>
+                        <a:srgbClr val="F6DCD5"/>
                       </a:solidFill>
                       <a:prstDash val="solid"/>
                     </a:lnR>
                     <a:lnT w="9525" cap="flat" cmpd="sng" algn="ctr">
                       <a:solidFill>
-                        <a:srgbClr val="F5D4CC"/>
+                        <a:srgbClr val="F6DCD5"/>
                       </a:solidFill>
                       <a:prstDash val="solid"/>
                     </a:lnT>
                     <a:lnB w="9525" cap="flat" cmpd="sng" algn="ctr">
                       <a:solidFill>
-                        <a:srgbClr val="F5D4CC"/>
+                        <a:srgbClr val="F6DCD5"/>
                       </a:solidFill>
                       <a:prstDash val="solid"/>
                     </a:lnB>
@@ -6031,7 +6314,7 @@
                       <a:r>
                         <a:rPr sz="1500" b="0">
                           <a:solidFill>
-                            <a:srgbClr val="2B2B2B"/>
+                            <a:srgbClr val="26231F"/>
                           </a:solidFill>
                         </a:rPr>
                         <a:t/>
@@ -6041,25 +6324,25 @@
                   <a:tcPr anchor="ctr" marL="73152" marR="73152">
                     <a:lnL w="9525" cap="flat" cmpd="sng" algn="ctr">
                       <a:solidFill>
-                        <a:srgbClr val="F5D4CC"/>
+                        <a:srgbClr val="F6DCD5"/>
                       </a:solidFill>
                       <a:prstDash val="solid"/>
                     </a:lnL>
                     <a:lnR w="9525" cap="flat" cmpd="sng" algn="ctr">
                       <a:solidFill>
-                        <a:srgbClr val="F5D4CC"/>
+                        <a:srgbClr val="F6DCD5"/>
                       </a:solidFill>
                       <a:prstDash val="solid"/>
                     </a:lnR>
                     <a:lnT w="9525" cap="flat" cmpd="sng" algn="ctr">
                       <a:solidFill>
-                        <a:srgbClr val="F5D4CC"/>
+                        <a:srgbClr val="F6DCD5"/>
                       </a:solidFill>
                       <a:prstDash val="solid"/>
                     </a:lnT>
                     <a:lnB w="9525" cap="flat" cmpd="sng" algn="ctr">
                       <a:solidFill>
-                        <a:srgbClr val="F5D4CC"/>
+                        <a:srgbClr val="F6DCD5"/>
                       </a:solidFill>
                       <a:prstDash val="solid"/>
                     </a:lnB>
@@ -6077,7 +6360,7 @@
                       <a:r>
                         <a:rPr sz="1500" b="0">
                           <a:solidFill>
-                            <a:srgbClr val="2B2B2B"/>
+                            <a:srgbClr val="26231F"/>
                           </a:solidFill>
                         </a:rPr>
                         <a:t/>
@@ -6087,25 +6370,25 @@
                   <a:tcPr anchor="ctr" marL="73152" marR="73152">
                     <a:lnL w="9525" cap="flat" cmpd="sng" algn="ctr">
                       <a:solidFill>
-                        <a:srgbClr val="F5D4CC"/>
+                        <a:srgbClr val="F6DCD5"/>
                       </a:solidFill>
                       <a:prstDash val="solid"/>
                     </a:lnL>
                     <a:lnR w="9525" cap="flat" cmpd="sng" algn="ctr">
                       <a:solidFill>
-                        <a:srgbClr val="F5D4CC"/>
+                        <a:srgbClr val="F6DCD5"/>
                       </a:solidFill>
                       <a:prstDash val="solid"/>
                     </a:lnR>
                     <a:lnT w="9525" cap="flat" cmpd="sng" algn="ctr">
                       <a:solidFill>
-                        <a:srgbClr val="F5D4CC"/>
+                        <a:srgbClr val="F6DCD5"/>
                       </a:solidFill>
                       <a:prstDash val="solid"/>
                     </a:lnT>
                     <a:lnB w="9525" cap="flat" cmpd="sng" algn="ctr">
                       <a:solidFill>
-                        <a:srgbClr val="F5D4CC"/>
+                        <a:srgbClr val="F6DCD5"/>
                       </a:solidFill>
                       <a:prstDash val="solid"/>
                     </a:lnB>
@@ -6125,7 +6408,7 @@
                       <a:r>
                         <a:rPr sz="1500" b="1">
                           <a:solidFill>
-                            <a:srgbClr val="5B2315"/>
+                            <a:srgbClr val="492E27"/>
                           </a:solidFill>
                         </a:rPr>
                         <a:t>4</a:t>
@@ -6135,30 +6418,30 @@
                   <a:tcPr anchor="ctr" marL="73152" marR="73152">
                     <a:lnL w="9525" cap="flat" cmpd="sng" algn="ctr">
                       <a:solidFill>
-                        <a:srgbClr val="F5D4CC"/>
+                        <a:srgbClr val="F6DCD5"/>
                       </a:solidFill>
                       <a:prstDash val="solid"/>
                     </a:lnL>
                     <a:lnR w="9525" cap="flat" cmpd="sng" algn="ctr">
                       <a:solidFill>
-                        <a:srgbClr val="F5D4CC"/>
+                        <a:srgbClr val="F6DCD5"/>
                       </a:solidFill>
                       <a:prstDash val="solid"/>
                     </a:lnR>
                     <a:lnT w="9525" cap="flat" cmpd="sng" algn="ctr">
                       <a:solidFill>
-                        <a:srgbClr val="F5D4CC"/>
+                        <a:srgbClr val="F6DCD5"/>
                       </a:solidFill>
                       <a:prstDash val="solid"/>
                     </a:lnT>
                     <a:lnB w="9525" cap="flat" cmpd="sng" algn="ctr">
                       <a:solidFill>
-                        <a:srgbClr val="F5D4CC"/>
+                        <a:srgbClr val="F6DCD5"/>
                       </a:solidFill>
                       <a:prstDash val="solid"/>
                     </a:lnB>
                     <a:solidFill>
-                      <a:srgbClr val="F5D4CC"/>
+                      <a:srgbClr val="F6DCD5"/>
                     </a:solidFill>
                   </a:tcPr>
                 </a:tc>
@@ -6171,7 +6454,7 @@
                       <a:r>
                         <a:rPr sz="1500" b="0">
                           <a:solidFill>
-                            <a:srgbClr val="2B2B2B"/>
+                            <a:srgbClr val="26231F"/>
                           </a:solidFill>
                         </a:rPr>
                         <a:t>내용 입력</a:t>
@@ -6181,30 +6464,30 @@
                   <a:tcPr anchor="ctr" marL="73152" marR="73152">
                     <a:lnL w="9525" cap="flat" cmpd="sng" algn="ctr">
                       <a:solidFill>
-                        <a:srgbClr val="F5D4CC"/>
+                        <a:srgbClr val="F6DCD5"/>
                       </a:solidFill>
                       <a:prstDash val="solid"/>
                     </a:lnL>
                     <a:lnR w="9525" cap="flat" cmpd="sng" algn="ctr">
                       <a:solidFill>
-                        <a:srgbClr val="F5D4CC"/>
+                        <a:srgbClr val="F6DCD5"/>
                       </a:solidFill>
                       <a:prstDash val="solid"/>
                     </a:lnR>
                     <a:lnT w="9525" cap="flat" cmpd="sng" algn="ctr">
                       <a:solidFill>
-                        <a:srgbClr val="F5D4CC"/>
+                        <a:srgbClr val="F6DCD5"/>
                       </a:solidFill>
                       <a:prstDash val="solid"/>
                     </a:lnT>
                     <a:lnB w="9525" cap="flat" cmpd="sng" algn="ctr">
                       <a:solidFill>
-                        <a:srgbClr val="F5D4CC"/>
+                        <a:srgbClr val="F6DCD5"/>
                       </a:solidFill>
                       <a:prstDash val="solid"/>
                     </a:lnB>
                     <a:solidFill>
-                      <a:srgbClr val="FBF1EE"/>
+                      <a:srgbClr val="FBEFEC"/>
                     </a:solidFill>
                   </a:tcPr>
                 </a:tc>
@@ -6217,7 +6500,7 @@
                       <a:r>
                         <a:rPr sz="1500" b="0">
                           <a:solidFill>
-                            <a:srgbClr val="2B2B2B"/>
+                            <a:srgbClr val="26231F"/>
                           </a:solidFill>
                         </a:rPr>
                         <a:t/>
@@ -6227,30 +6510,30 @@
                   <a:tcPr anchor="ctr" marL="73152" marR="73152">
                     <a:lnL w="9525" cap="flat" cmpd="sng" algn="ctr">
                       <a:solidFill>
-                        <a:srgbClr val="F5D4CC"/>
+                        <a:srgbClr val="F6DCD5"/>
                       </a:solidFill>
                       <a:prstDash val="solid"/>
                     </a:lnL>
                     <a:lnR w="9525" cap="flat" cmpd="sng" algn="ctr">
                       <a:solidFill>
-                        <a:srgbClr val="F5D4CC"/>
+                        <a:srgbClr val="F6DCD5"/>
                       </a:solidFill>
                       <a:prstDash val="solid"/>
                     </a:lnR>
                     <a:lnT w="9525" cap="flat" cmpd="sng" algn="ctr">
                       <a:solidFill>
-                        <a:srgbClr val="F5D4CC"/>
+                        <a:srgbClr val="F6DCD5"/>
                       </a:solidFill>
                       <a:prstDash val="solid"/>
                     </a:lnT>
                     <a:lnB w="9525" cap="flat" cmpd="sng" algn="ctr">
                       <a:solidFill>
-                        <a:srgbClr val="F5D4CC"/>
+                        <a:srgbClr val="F6DCD5"/>
                       </a:solidFill>
                       <a:prstDash val="solid"/>
                     </a:lnB>
                     <a:solidFill>
-                      <a:srgbClr val="FBF1EE"/>
+                      <a:srgbClr val="FBEFEC"/>
                     </a:solidFill>
                   </a:tcPr>
                 </a:tc>
@@ -6263,7 +6546,7 @@
                       <a:r>
                         <a:rPr sz="1500" b="0">
                           <a:solidFill>
-                            <a:srgbClr val="2B2B2B"/>
+                            <a:srgbClr val="26231F"/>
                           </a:solidFill>
                         </a:rPr>
                         <a:t/>
@@ -6273,30 +6556,30 @@
                   <a:tcPr anchor="ctr" marL="73152" marR="73152">
                     <a:lnL w="9525" cap="flat" cmpd="sng" algn="ctr">
                       <a:solidFill>
-                        <a:srgbClr val="F5D4CC"/>
+                        <a:srgbClr val="F6DCD5"/>
                       </a:solidFill>
                       <a:prstDash val="solid"/>
                     </a:lnL>
                     <a:lnR w="9525" cap="flat" cmpd="sng" algn="ctr">
                       <a:solidFill>
-                        <a:srgbClr val="F5D4CC"/>
+                        <a:srgbClr val="F6DCD5"/>
                       </a:solidFill>
                       <a:prstDash val="solid"/>
                     </a:lnR>
                     <a:lnT w="9525" cap="flat" cmpd="sng" algn="ctr">
                       <a:solidFill>
-                        <a:srgbClr val="F5D4CC"/>
+                        <a:srgbClr val="F6DCD5"/>
                       </a:solidFill>
                       <a:prstDash val="solid"/>
                     </a:lnT>
                     <a:lnB w="9525" cap="flat" cmpd="sng" algn="ctr">
                       <a:solidFill>
-                        <a:srgbClr val="F5D4CC"/>
+                        <a:srgbClr val="F6DCD5"/>
                       </a:solidFill>
                       <a:prstDash val="solid"/>
                     </a:lnB>
                     <a:solidFill>
-                      <a:srgbClr val="FBF1EE"/>
+                      <a:srgbClr val="FBEFEC"/>
                     </a:solidFill>
                   </a:tcPr>
                 </a:tc>
@@ -6311,7 +6594,7 @@
                       <a:r>
                         <a:rPr sz="1500" b="1">
                           <a:solidFill>
-                            <a:srgbClr val="5B2315"/>
+                            <a:srgbClr val="492E27"/>
                           </a:solidFill>
                         </a:rPr>
                         <a:t>5</a:t>
@@ -6321,30 +6604,30 @@
                   <a:tcPr anchor="ctr" marL="73152" marR="73152">
                     <a:lnL w="9525" cap="flat" cmpd="sng" algn="ctr">
                       <a:solidFill>
-                        <a:srgbClr val="F5D4CC"/>
+                        <a:srgbClr val="F6DCD5"/>
                       </a:solidFill>
                       <a:prstDash val="solid"/>
                     </a:lnL>
                     <a:lnR w="9525" cap="flat" cmpd="sng" algn="ctr">
                       <a:solidFill>
-                        <a:srgbClr val="F5D4CC"/>
+                        <a:srgbClr val="F6DCD5"/>
                       </a:solidFill>
                       <a:prstDash val="solid"/>
                     </a:lnR>
                     <a:lnT w="9525" cap="flat" cmpd="sng" algn="ctr">
                       <a:solidFill>
-                        <a:srgbClr val="F5D4CC"/>
+                        <a:srgbClr val="F6DCD5"/>
                       </a:solidFill>
                       <a:prstDash val="solid"/>
                     </a:lnT>
                     <a:lnB w="9525" cap="flat" cmpd="sng" algn="ctr">
                       <a:solidFill>
-                        <a:srgbClr val="F5D4CC"/>
+                        <a:srgbClr val="F6DCD5"/>
                       </a:solidFill>
                       <a:prstDash val="solid"/>
                     </a:lnB>
                     <a:solidFill>
-                      <a:srgbClr val="F5D4CC"/>
+                      <a:srgbClr val="F6DCD5"/>
                     </a:solidFill>
                   </a:tcPr>
                 </a:tc>
@@ -6357,7 +6640,7 @@
                       <a:r>
                         <a:rPr sz="1500" b="0">
                           <a:solidFill>
-                            <a:srgbClr val="2B2B2B"/>
+                            <a:srgbClr val="26231F"/>
                           </a:solidFill>
                         </a:rPr>
                         <a:t>내용 입력</a:t>
@@ -6367,25 +6650,25 @@
                   <a:tcPr anchor="ctr" marL="73152" marR="73152">
                     <a:lnL w="9525" cap="flat" cmpd="sng" algn="ctr">
                       <a:solidFill>
-                        <a:srgbClr val="F5D4CC"/>
+                        <a:srgbClr val="F6DCD5"/>
                       </a:solidFill>
                       <a:prstDash val="solid"/>
                     </a:lnL>
                     <a:lnR w="9525" cap="flat" cmpd="sng" algn="ctr">
                       <a:solidFill>
-                        <a:srgbClr val="F5D4CC"/>
+                        <a:srgbClr val="F6DCD5"/>
                       </a:solidFill>
                       <a:prstDash val="solid"/>
                     </a:lnR>
                     <a:lnT w="9525" cap="flat" cmpd="sng" algn="ctr">
                       <a:solidFill>
-                        <a:srgbClr val="F5D4CC"/>
+                        <a:srgbClr val="F6DCD5"/>
                       </a:solidFill>
                       <a:prstDash val="solid"/>
                     </a:lnT>
                     <a:lnB w="9525" cap="flat" cmpd="sng" algn="ctr">
                       <a:solidFill>
-                        <a:srgbClr val="F5D4CC"/>
+                        <a:srgbClr val="F6DCD5"/>
                       </a:solidFill>
                       <a:prstDash val="solid"/>
                     </a:lnB>
@@ -6403,7 +6686,7 @@
                       <a:r>
                         <a:rPr sz="1500" b="0">
                           <a:solidFill>
-                            <a:srgbClr val="2B2B2B"/>
+                            <a:srgbClr val="26231F"/>
                           </a:solidFill>
                         </a:rPr>
                         <a:t/>
@@ -6413,25 +6696,25 @@
                   <a:tcPr anchor="ctr" marL="73152" marR="73152">
                     <a:lnL w="9525" cap="flat" cmpd="sng" algn="ctr">
                       <a:solidFill>
-                        <a:srgbClr val="F5D4CC"/>
+                        <a:srgbClr val="F6DCD5"/>
                       </a:solidFill>
                       <a:prstDash val="solid"/>
                     </a:lnL>
                     <a:lnR w="9525" cap="flat" cmpd="sng" algn="ctr">
                       <a:solidFill>
-                        <a:srgbClr val="F5D4CC"/>
+                        <a:srgbClr val="F6DCD5"/>
                       </a:solidFill>
                       <a:prstDash val="solid"/>
                     </a:lnR>
                     <a:lnT w="9525" cap="flat" cmpd="sng" algn="ctr">
                       <a:solidFill>
-                        <a:srgbClr val="F5D4CC"/>
+                        <a:srgbClr val="F6DCD5"/>
                       </a:solidFill>
                       <a:prstDash val="solid"/>
                     </a:lnT>
                     <a:lnB w="9525" cap="flat" cmpd="sng" algn="ctr">
                       <a:solidFill>
-                        <a:srgbClr val="F5D4CC"/>
+                        <a:srgbClr val="F6DCD5"/>
                       </a:solidFill>
                       <a:prstDash val="solid"/>
                     </a:lnB>
@@ -6449,7 +6732,7 @@
                       <a:r>
                         <a:rPr sz="1500" b="0">
                           <a:solidFill>
-                            <a:srgbClr val="2B2B2B"/>
+                            <a:srgbClr val="26231F"/>
                           </a:solidFill>
                         </a:rPr>
                         <a:t/>
@@ -6459,25 +6742,25 @@
                   <a:tcPr anchor="ctr" marL="73152" marR="73152">
                     <a:lnL w="9525" cap="flat" cmpd="sng" algn="ctr">
                       <a:solidFill>
-                        <a:srgbClr val="F5D4CC"/>
+                        <a:srgbClr val="F6DCD5"/>
                       </a:solidFill>
                       <a:prstDash val="solid"/>
                     </a:lnL>
                     <a:lnR w="9525" cap="flat" cmpd="sng" algn="ctr">
                       <a:solidFill>
-                        <a:srgbClr val="F5D4CC"/>
+                        <a:srgbClr val="F6DCD5"/>
                       </a:solidFill>
                       <a:prstDash val="solid"/>
                     </a:lnR>
                     <a:lnT w="9525" cap="flat" cmpd="sng" algn="ctr">
                       <a:solidFill>
-                        <a:srgbClr val="F5D4CC"/>
+                        <a:srgbClr val="F6DCD5"/>
                       </a:solidFill>
                       <a:prstDash val="solid"/>
                     </a:lnT>
                     <a:lnB w="9525" cap="flat" cmpd="sng" algn="ctr">
                       <a:solidFill>
-                        <a:srgbClr val="F5D4CC"/>
+                        <a:srgbClr val="F6DCD5"/>
                       </a:solidFill>
                       <a:prstDash val="solid"/>
                     </a:lnB>
@@ -6502,6 +6785,14 @@
 <file path=ppt/slides/slide6.xml><?xml version="1.0" encoding="utf-8"?>
 <p:sld xmlns:a="http://schemas.openxmlformats.org/drawingml/2006/main" xmlns:p="http://schemas.openxmlformats.org/presentationml/2006/main" xmlns:r="http://schemas.openxmlformats.org/officeDocument/2006/relationships">
   <p:cSld>
+    <p:bg>
+      <p:bgPr>
+        <a:solidFill>
+          <a:srgbClr val="492E27"/>
+        </a:solidFill>
+        <a:effectLst/>
+      </p:bgPr>
+    </p:bg>
     <p:spTree>
       <p:nvGrpSpPr>
         <p:cNvPr id="1" name=""/>
@@ -6509,30 +6800,102 @@
         <p:nvPr/>
       </p:nvGrpSpPr>
       <p:grpSpPr/>
-      <p:pic>
-        <p:nvPicPr>
-          <p:cNvPr id="3" name="표지 그림" descr="talk-30.jpg"/>
-          <p:cNvPicPr>
-            <a:picLocks noChangeAspect="1"/>
-          </p:cNvPicPr>
+      <p:sp>
+        <p:nvSpPr>
+          <p:cNvPr id="3" name="장식"/>
+          <p:cNvSpPr/>
           <p:nvPr/>
-        </p:nvPicPr>
-        <p:blipFill>
-          <a:blip r:embed="rId2"/>
-          <a:stretch>
-            <a:fillRect/>
-          </a:stretch>
-        </p:blipFill>
+        </p:nvSpPr>
         <p:spPr>
           <a:xfrm>
             <a:off x="0" y="0"/>
-            <a:ext cx="12191695" cy="6858000"/>
+            <a:ext cx="3657508" cy="6858000"/>
           </a:xfrm>
           <a:prstGeom prst="rect">
             <a:avLst/>
           </a:prstGeom>
-        </p:spPr>
-      </p:pic>
+          <a:solidFill>
+            <a:srgbClr val="D88C79"/>
+          </a:solidFill>
+          <a:ln>
+            <a:noFill/>
+          </a:ln>
+        </p:spPr>
+        <p:txBody>
+          <a:bodyPr rtlCol="0" anchor="ctr"/>
+          <a:lstStyle/>
+          <a:p>
+            <a:pPr algn="ctr"/>
+          </a:p>
+        </p:txBody>
+      </p:sp>
+      <p:sp>
+        <p:nvSpPr>
+          <p:cNvPr id="4" name="장식"/>
+          <p:cNvSpPr/>
+          <p:nvPr/>
+        </p:nvSpPr>
+        <p:spPr>
+          <a:xfrm>
+            <a:off x="3108868" y="2880360"/>
+            <a:ext cx="1097280" cy="1097280"/>
+          </a:xfrm>
+          <a:prstGeom prst="ellipse">
+            <a:avLst/>
+          </a:prstGeom>
+          <a:solidFill>
+            <a:srgbClr val="A66B5C"/>
+          </a:solidFill>
+          <a:ln>
+            <a:noFill/>
+          </a:ln>
+        </p:spPr>
+        <p:txBody>
+          <a:bodyPr rtlCol="0" anchor="ctr"/>
+          <a:lstStyle/>
+          <a:p>
+            <a:pPr algn="ctr"/>
+          </a:p>
+        </p:txBody>
+      </p:sp>
+      <p:sp>
+        <p:nvSpPr>
+          <p:cNvPr id="5" name="라벨"/>
+          <p:cNvSpPr txBox="1"/>
+          <p:nvPr/>
+        </p:nvSpPr>
+        <p:spPr>
+          <a:xfrm>
+            <a:off x="4632844" y="2148840"/>
+            <a:ext cx="6705432" cy="274320"/>
+          </a:xfrm>
+          <a:prstGeom prst="rect">
+            <a:avLst/>
+          </a:prstGeom>
+          <a:noFill/>
+        </p:spPr>
+        <p:txBody>
+          <a:bodyPr wrap="square" lIns="54864" rIns="54864" tIns="27432" bIns="27432" anchor="t">
+            <a:noAutofit/>
+          </a:bodyPr>
+          <a:lstStyle/>
+          <a:p>
+            <a:pPr algn="l">
+              <a:lnSpc>
+                <a:spcPct val="115000"/>
+              </a:lnSpc>
+            </a:pPr>
+            <a:r>
+              <a:rPr sz="1000" b="1" i="0" spc="250">
+                <a:solidFill>
+                  <a:srgbClr val="FFFFFF"/>
+                </a:solidFill>
+              </a:rPr>
+              <a:t>PRESENTATION</a:t>
+            </a:r>
+          </a:p>
+        </p:txBody>
+      </p:sp>
       <p:sp>
         <p:nvSpPr>
           <p:cNvPr id="2" name="Title 1"/>
@@ -6545,8 +6908,8 @@
         </p:nvSpPr>
         <p:spPr>
           <a:xfrm>
-            <a:off x="853418" y="2057400"/>
-            <a:ext cx="6095847" cy="1554480"/>
+            <a:off x="4632844" y="2606040"/>
+            <a:ext cx="6705432" cy="1188720"/>
           </a:xfrm>
         </p:spPr>
         <p:txBody>
@@ -6561,9 +6924,9 @@
               </a:lnSpc>
             </a:pPr>
             <a:r>
-              <a:rPr sz="3600" b="1" i="0">
+              <a:rPr sz="4000" b="1" i="0">
                 <a:solidFill>
-                  <a:srgbClr val="5B2315"/>
+                  <a:srgbClr val="FFFFFF"/>
                 </a:solidFill>
               </a:rPr>
               <a:t>감사합니다</a:t>
@@ -6573,14 +6936,14 @@
       </p:sp>
       <p:sp>
         <p:nvSpPr>
-          <p:cNvPr id="4" name="한 줄 문구"/>
+          <p:cNvPr id="6" name="한 줄 문구"/>
           <p:cNvSpPr txBox="1"/>
           <p:nvPr/>
         </p:nvSpPr>
         <p:spPr>
           <a:xfrm>
-            <a:off x="853418" y="3749039"/>
-            <a:ext cx="6095847" cy="822960"/>
+            <a:off x="4632844" y="3886200"/>
+            <a:ext cx="6705432" cy="822960"/>
           </a:xfrm>
           <a:prstGeom prst="rect">
             <a:avLst/>
@@ -6599,9 +6962,9 @@
               </a:lnSpc>
             </a:pPr>
             <a:r>
-              <a:rPr sz="1700" b="0" i="1">
+              <a:rPr sz="1700" b="0" i="0">
                 <a:solidFill>
-                  <a:srgbClr val="5B2315"/>
+                  <a:srgbClr val="FFFFFF"/>
                 </a:solidFill>
               </a:rPr>
               <a:t>끝까지 들어 주셔서 고맙습니다</a:t>
@@ -6611,14 +6974,14 @@
       </p:sp>
       <p:sp>
         <p:nvSpPr>
-          <p:cNvPr id="5" name="안내 문구"/>
+          <p:cNvPr id="7" name="안내 문구"/>
           <p:cNvSpPr txBox="1"/>
           <p:nvPr/>
         </p:nvSpPr>
         <p:spPr>
           <a:xfrm>
-            <a:off x="853418" y="4617720"/>
-            <a:ext cx="6095847" cy="914400"/>
+            <a:off x="4632844" y="4754880"/>
+            <a:ext cx="6705432" cy="914400"/>
           </a:xfrm>
           <a:prstGeom prst="rect">
             <a:avLst/>
@@ -6639,7 +7002,7 @@
             <a:r>
               <a:rPr sz="1400" b="0" i="0">
                 <a:solidFill>
-                  <a:srgbClr val="666666"/>
+                  <a:srgbClr val="FFFFFF"/>
                 </a:solidFill>
               </a:rPr>
               <a:t>문의 · 연락처를 입력하세요</a:t>
@@ -6666,34 +7029,34 @@
         <a:sysClr val="window" lastClr="FFFFFF"/>
       </a:lt1>
       <a:dk2>
-        <a:srgbClr val="5B2315"/>
+        <a:srgbClr val="492E27"/>
       </a:dk2>
       <a:lt2>
-        <a:srgbClr val="FBF1EE"/>
+        <a:srgbClr val="FBEFEC"/>
       </a:lt2>
       <a:accent1>
-        <a:srgbClr val="AE4329"/>
+        <a:srgbClr val="D88C79"/>
       </a:accent1>
       <a:accent2>
-        <a:srgbClr val="3B9177"/>
+        <a:srgbClr val="E1C998"/>
       </a:accent2>
       <a:accent3>
-        <a:srgbClr val="5B2315"/>
+        <a:srgbClr val="492E27"/>
       </a:accent3>
       <a:accent4>
-        <a:srgbClr val="F5D4CC"/>
+        <a:srgbClr val="F6DCD5"/>
       </a:accent4>
       <a:accent5>
-        <a:srgbClr val="746A50"/>
+        <a:srgbClr val="DCAA88"/>
       </a:accent5>
       <a:accent6>
-        <a:srgbClr val="9D7B73"/>
+        <a:srgbClr val="92827D"/>
       </a:accent6>
       <a:hlink>
-        <a:srgbClr val="AE4329"/>
+        <a:srgbClr val="D88C79"/>
       </a:hlink>
       <a:folHlink>
-        <a:srgbClr val="5B2315"/>
+        <a:srgbClr val="492E27"/>
       </a:folHlink>
     </a:clrScheme>
     <a:fontScheme name="Office">
